--- a/問題定義プレゼン_自己分析迷子_Onda.pptx
+++ b/問題定義プレゼン_自己分析迷子_Onda.pptx
@@ -3110,7 +3110,7 @@
         <p:spPr>
           <a:xfrm>
             <a:off x="548640" y="274320"/>
-            <a:ext cx="10972800" cy="457200"/>
+            <a:ext cx="11064240" cy="457200"/>
           </a:xfrm>
           <a:prstGeom prst="rect">
             <a:avLst/>
@@ -3118,21 +3118,28 @@
           <a:noFill/>
         </p:spPr>
         <p:txBody>
-          <a:bodyPr wrap="square">
-            <a:spAutoFit/>
+          <a:bodyPr wrap="square" lIns="0" rIns="0" anchor="t">
+            <a:noAutofit/>
           </a:bodyPr>
           <a:lstStyle/>
           <a:p>
             <a:pPr algn="l">
+              <a:lnSpc>
+                <a:spcPct val="115000"/>
+              </a:lnSpc>
               <a:defRPr sz="1200" b="0">
                 <a:solidFill>
                   <a:srgbClr val="6B6F6B"/>
                 </a:solidFill>
-                <a:latin typeface="Yu Gothic"/>
               </a:defRPr>
             </a:pPr>
             <a:r>
-              <a:t>● 特別演習II — 問題定義プレゼンテーション    次回授業用 ● 発表準備中</a:t>
+              <a:rPr>
+                <a:latin typeface="Meiryo"/>
+                <a:ea typeface="Meiryo"/>
+                <a:cs typeface="Meiryo"/>
+              </a:rPr>
+              <a:t>● 特別演習II — 問題定義プレゼンテーション　　次回授業用 ● 発表準備中</a:t>
             </a:r>
           </a:p>
         </p:txBody>
@@ -3145,8 +3152,8 @@
         </p:nvSpPr>
         <p:spPr>
           <a:xfrm>
-            <a:off x="548640" y="822960"/>
-            <a:ext cx="10972800" cy="2011680"/>
+            <a:off x="548640" y="777240"/>
+            <a:ext cx="11064240" cy="1554480"/>
           </a:xfrm>
           <a:prstGeom prst="rect">
             <a:avLst/>
@@ -3154,20 +3161,27 @@
           <a:noFill/>
         </p:spPr>
         <p:txBody>
-          <a:bodyPr wrap="square">
-            <a:spAutoFit/>
+          <a:bodyPr wrap="square" lIns="0" rIns="0" anchor="t">
+            <a:noAutofit/>
           </a:bodyPr>
           <a:lstStyle/>
           <a:p>
             <a:pPr algn="l">
-              <a:defRPr sz="5400" b="1">
+              <a:lnSpc>
+                <a:spcPct val="115000"/>
+              </a:lnSpc>
+              <a:defRPr sz="4400" b="1">
                 <a:solidFill>
                   <a:srgbClr val="111311"/>
                 </a:solidFill>
-                <a:latin typeface="Yu Gothic"/>
               </a:defRPr>
             </a:pPr>
             <a:r>
+              <a:rPr>
+                <a:latin typeface="Meiryo"/>
+                <a:ea typeface="Meiryo"/>
+                <a:cs typeface="Meiryo"/>
+              </a:rPr>
               <a:t>なんとなく就活を、なくそう。</a:t>
             </a:r>
           </a:p>
@@ -3181,8 +3195,8 @@
         </p:nvSpPr>
         <p:spPr>
           <a:xfrm>
-            <a:off x="548640" y="2834640"/>
-            <a:ext cx="6858000" cy="1280160"/>
+            <a:off x="548640" y="2468880"/>
+            <a:ext cx="7498079" cy="1371600"/>
           </a:xfrm>
           <a:prstGeom prst="rect">
             <a:avLst/>
@@ -3190,20 +3204,27 @@
           <a:noFill/>
         </p:spPr>
         <p:txBody>
-          <a:bodyPr wrap="square">
-            <a:spAutoFit/>
+          <a:bodyPr wrap="square" lIns="0" rIns="0" anchor="t">
+            <a:noAutofit/>
           </a:bodyPr>
           <a:lstStyle/>
           <a:p>
             <a:pPr algn="l">
-              <a:defRPr sz="1600" b="0">
+              <a:lnSpc>
+                <a:spcPct val="115000"/>
+              </a:lnSpc>
+              <a:defRPr sz="1500" b="0">
                 <a:solidFill>
                   <a:srgbClr val="333333"/>
                 </a:solidFill>
-                <a:latin typeface="Yu Gothic"/>
               </a:defRPr>
             </a:pPr>
             <a:r>
+              <a:rPr>
+                <a:latin typeface="Meiryo"/>
+                <a:ea typeface="Meiryo"/>
+                <a:cs typeface="Meiryo"/>
+              </a:rPr>
               <a:t>本来は全員が十分な自己理解で挑むべきにもかかわらず、やり方とゴールが分からないために、6割が苦戦したまま選考に進んでしまう。</a:t>
             </a:r>
           </a:p>
@@ -3217,11 +3238,13 @@
         </p:nvSpPr>
         <p:spPr>
           <a:xfrm>
-            <a:off x="548640" y="4297680"/>
-            <a:ext cx="2194560" cy="594360"/>
+            <a:off x="548640" y="4023360"/>
+            <a:ext cx="2377440" cy="566928"/>
           </a:xfrm>
           <a:prstGeom prst="roundRect">
-            <a:avLst/>
+            <a:avLst>
+              <a:gd name="adj" fmla="val 50000"/>
+            </a:avLst>
           </a:prstGeom>
           <a:solidFill>
             <a:srgbClr val="111311"/>
@@ -3245,7 +3268,9 @@
           </a:fontRef>
         </p:style>
         <p:txBody>
-          <a:bodyPr rtlCol="0" anchor="t"/>
+          <a:bodyPr rtlCol="0" anchor="ctr" wrap="square" lIns="137160" rIns="137160">
+            <a:noAutofit/>
+          </a:bodyPr>
           <a:lstStyle/>
           <a:p>
             <a:pPr algn="ctr">
@@ -3253,10 +3278,14 @@
                 <a:solidFill>
                   <a:srgbClr val="FFFFFF"/>
                 </a:solidFill>
-                <a:latin typeface="Yu Gothic"/>
               </a:defRPr>
             </a:pPr>
             <a:r>
+              <a:rPr>
+                <a:latin typeface="Meiryo"/>
+                <a:ea typeface="Meiryo"/>
+                <a:cs typeface="Meiryo"/>
+              </a:rPr>
               <a:t>問題定義を見る</a:t>
             </a:r>
           </a:p>
@@ -3270,11 +3299,13 @@
         </p:nvSpPr>
         <p:spPr>
           <a:xfrm>
-            <a:off x="2926080" y="4297680"/>
-            <a:ext cx="1828800" cy="594360"/>
+            <a:off x="3063240" y="4023360"/>
+            <a:ext cx="2011680" cy="566928"/>
           </a:xfrm>
           <a:prstGeom prst="roundRect">
-            <a:avLst/>
+            <a:avLst>
+              <a:gd name="adj" fmla="val 50000"/>
+            </a:avLst>
           </a:prstGeom>
           <a:solidFill>
             <a:srgbClr val="FFFFFF"/>
@@ -3298,7 +3329,9 @@
           </a:fontRef>
         </p:style>
         <p:txBody>
-          <a:bodyPr rtlCol="0" anchor="t"/>
+          <a:bodyPr rtlCol="0" anchor="ctr" wrap="square" lIns="137160" rIns="137160">
+            <a:noAutofit/>
+          </a:bodyPr>
           <a:lstStyle/>
           <a:p>
             <a:pPr algn="ctr">
@@ -3306,10 +3339,14 @@
                 <a:solidFill>
                   <a:srgbClr val="111311"/>
                 </a:solidFill>
-                <a:latin typeface="Yu Gothic"/>
               </a:defRPr>
             </a:pPr>
             <a:r>
+              <a:rPr>
+                <a:latin typeface="Meiryo"/>
+                <a:ea typeface="Meiryo"/>
+                <a:cs typeface="Meiryo"/>
+              </a:rPr>
               <a:t>データを見る</a:t>
             </a:r>
           </a:p>
@@ -3323,8 +3360,8 @@
         </p:nvSpPr>
         <p:spPr>
           <a:xfrm>
-            <a:off x="548640" y="5212080"/>
-            <a:ext cx="10972800" cy="365760"/>
+            <a:off x="548640" y="4983480"/>
+            <a:ext cx="11064240" cy="822960"/>
           </a:xfrm>
           <a:prstGeom prst="rect">
             <a:avLst/>
@@ -3332,21 +3369,28 @@
           <a:noFill/>
         </p:spPr>
         <p:txBody>
-          <a:bodyPr wrap="square">
-            <a:spAutoFit/>
+          <a:bodyPr wrap="square" lIns="0" rIns="0" anchor="t">
+            <a:noAutofit/>
           </a:bodyPr>
           <a:lstStyle/>
           <a:p>
             <a:pPr algn="l">
+              <a:lnSpc>
+                <a:spcPct val="115000"/>
+              </a:lnSpc>
               <a:defRPr sz="1200" b="0">
                 <a:solidFill>
                   <a:srgbClr val="6B6F6B"/>
                 </a:solidFill>
-                <a:latin typeface="Yu Gothic"/>
               </a:defRPr>
             </a:pPr>
             <a:r>
-              <a:t>Trusted by data from　　学情 n=275　　マイナビ n=1268　　doda n=317　　白書 企業1182社　　Synergy n=200</a:t>
+              <a:rPr>
+                <a:latin typeface="Meiryo"/>
+                <a:ea typeface="Meiryo"/>
+                <a:cs typeface="Meiryo"/>
+              </a:rPr>
+              <a:t>Trusted by data from　　　学情 n=275　　　マイナビ n=1268　　　doda n=317　　　白書 企業1182社　　　Synergy n=200</a:t>
             </a:r>
           </a:p>
         </p:txBody>
@@ -3359,8 +3403,8 @@
         </p:nvSpPr>
         <p:spPr>
           <a:xfrm>
-            <a:off x="548640" y="6126480"/>
-            <a:ext cx="10972800" cy="365760"/>
+            <a:off x="548640" y="6172200"/>
+            <a:ext cx="11064240" cy="365760"/>
           </a:xfrm>
           <a:prstGeom prst="rect">
             <a:avLst/>
@@ -3368,20 +3412,27 @@
           <a:noFill/>
         </p:spPr>
         <p:txBody>
-          <a:bodyPr wrap="square">
-            <a:spAutoFit/>
+          <a:bodyPr wrap="square" lIns="0" rIns="0" anchor="t">
+            <a:noAutofit/>
           </a:bodyPr>
           <a:lstStyle/>
           <a:p>
             <a:pPr algn="r">
+              <a:lnSpc>
+                <a:spcPct val="115000"/>
+              </a:lnSpc>
               <a:defRPr sz="1000" b="0">
                 <a:solidFill>
                   <a:srgbClr val="6B6F6B"/>
                 </a:solidFill>
-                <a:latin typeface="Yu Gothic"/>
               </a:defRPr>
             </a:pPr>
             <a:r>
+              <a:rPr>
+                <a:latin typeface="Meiryo"/>
+                <a:ea typeface="Meiryo"/>
+                <a:cs typeface="Meiryo"/>
+              </a:rPr>
               <a:t>ジブン迷子. — Onda-inspired</a:t>
             </a:r>
           </a:p>
@@ -3421,8 +3472,8 @@
         </p:nvSpPr>
         <p:spPr>
           <a:xfrm>
-            <a:off x="548640" y="182880"/>
-            <a:ext cx="10972800" cy="365760"/>
+            <a:off x="548640" y="228600"/>
+            <a:ext cx="11064240" cy="365760"/>
           </a:xfrm>
           <a:prstGeom prst="rect">
             <a:avLst/>
@@ -3430,20 +3481,27 @@
           <a:noFill/>
         </p:spPr>
         <p:txBody>
-          <a:bodyPr wrap="square">
-            <a:spAutoFit/>
+          <a:bodyPr wrap="square" lIns="0" rIns="0" anchor="t">
+            <a:noAutofit/>
           </a:bodyPr>
           <a:lstStyle/>
           <a:p>
             <a:pPr algn="l">
+              <a:lnSpc>
+                <a:spcPct val="115000"/>
+              </a:lnSpc>
               <a:defRPr sz="1200" b="0">
                 <a:solidFill>
                   <a:srgbClr val="6B6F6B"/>
                 </a:solidFill>
-                <a:latin typeface="Yu Gothic"/>
               </a:defRPr>
             </a:pPr>
             <a:r>
+              <a:rPr>
+                <a:latin typeface="Meiryo"/>
+                <a:ea typeface="Meiryo"/>
+                <a:cs typeface="Meiryo"/>
+              </a:rPr>
               <a:t>(01) 理想と現状 — The gap</a:t>
             </a:r>
           </a:p>
@@ -3457,8 +3515,8 @@
         </p:nvSpPr>
         <p:spPr>
           <a:xfrm>
-            <a:off x="548640" y="548640"/>
-            <a:ext cx="10972800" cy="822960"/>
+            <a:off x="548640" y="594360"/>
+            <a:ext cx="11064240" cy="822960"/>
           </a:xfrm>
           <a:prstGeom prst="rect">
             <a:avLst/>
@@ -3466,20 +3524,27 @@
           <a:noFill/>
         </p:spPr>
         <p:txBody>
-          <a:bodyPr wrap="square">
-            <a:spAutoFit/>
+          <a:bodyPr wrap="square" lIns="0" rIns="0" anchor="t">
+            <a:noAutofit/>
           </a:bodyPr>
           <a:lstStyle/>
           <a:p>
             <a:pPr algn="l">
-              <a:defRPr sz="3600" b="1">
+              <a:lnSpc>
+                <a:spcPct val="115000"/>
+              </a:lnSpc>
+              <a:defRPr sz="3200" b="1">
                 <a:solidFill>
                   <a:srgbClr val="111311"/>
                 </a:solidFill>
-                <a:latin typeface="Yu Gothic"/>
               </a:defRPr>
             </a:pPr>
             <a:r>
+              <a:rPr>
+                <a:latin typeface="Meiryo"/>
+                <a:ea typeface="Meiryo"/>
+                <a:cs typeface="Meiryo"/>
+              </a:rPr>
               <a:t>あるべき姿と、いまの姿。</a:t>
             </a:r>
           </a:p>
@@ -3494,7 +3559,7 @@
         <p:spPr>
           <a:xfrm>
             <a:off x="548640" y="1371600"/>
-            <a:ext cx="10972800" cy="457200"/>
+            <a:ext cx="11064240" cy="457200"/>
           </a:xfrm>
           <a:prstGeom prst="rect">
             <a:avLst/>
@@ -3502,20 +3567,27 @@
           <a:noFill/>
         </p:spPr>
         <p:txBody>
-          <a:bodyPr wrap="square">
-            <a:spAutoFit/>
+          <a:bodyPr wrap="square" lIns="0" rIns="0" anchor="t">
+            <a:noAutofit/>
           </a:bodyPr>
           <a:lstStyle/>
           <a:p>
             <a:pPr algn="l">
-              <a:defRPr sz="1400" b="0">
+              <a:lnSpc>
+                <a:spcPct val="115000"/>
+              </a:lnSpc>
+              <a:defRPr sz="1300" b="0">
                 <a:solidFill>
                   <a:srgbClr val="333333"/>
                 </a:solidFill>
-                <a:latin typeface="Yu Gothic"/>
               </a:defRPr>
             </a:pPr>
             <a:r>
+              <a:rPr>
+                <a:latin typeface="Meiryo"/>
+                <a:ea typeface="Meiryo"/>
+                <a:cs typeface="Meiryo"/>
+              </a:rPr>
               <a:t>理想：十分な自己理解で挑む ／ 現状：手順もゴールも不明なまま10〜12月に突入</a:t>
             </a:r>
           </a:p>
@@ -3529,16 +3601,18 @@
         </p:nvSpPr>
         <p:spPr>
           <a:xfrm>
-            <a:off x="548640" y="2194560"/>
-            <a:ext cx="2651760" cy="3291840"/>
+            <a:off x="548640" y="2057400"/>
+            <a:ext cx="2651760" cy="3383280"/>
           </a:xfrm>
           <a:prstGeom prst="roundRect">
-            <a:avLst/>
+            <a:avLst>
+              <a:gd name="adj" fmla="val 12000"/>
+            </a:avLst>
           </a:prstGeom>
           <a:solidFill>
             <a:srgbClr val="FFFFFF"/>
           </a:solidFill>
-          <a:ln w="12700">
+          <a:ln w="15875">
             <a:solidFill>
               <a:srgbClr val="E5E1D8"/>
             </a:solidFill>
@@ -3574,8 +3648,8 @@
         </p:nvSpPr>
         <p:spPr>
           <a:xfrm>
-            <a:off x="731520" y="2377440"/>
-            <a:ext cx="2286000" cy="822960"/>
+            <a:off x="777240" y="2286000"/>
+            <a:ext cx="2194560" cy="822960"/>
           </a:xfrm>
           <a:prstGeom prst="rect">
             <a:avLst/>
@@ -3583,20 +3657,27 @@
           <a:noFill/>
         </p:spPr>
         <p:txBody>
-          <a:bodyPr wrap="square">
-            <a:spAutoFit/>
+          <a:bodyPr wrap="square" lIns="0" rIns="0" anchor="t">
+            <a:noAutofit/>
           </a:bodyPr>
           <a:lstStyle/>
           <a:p>
             <a:pPr algn="l">
-              <a:defRPr sz="3600" b="1">
+              <a:lnSpc>
+                <a:spcPct val="115000"/>
+              </a:lnSpc>
+              <a:defRPr sz="3400" b="1">
                 <a:solidFill>
                   <a:srgbClr val="111311"/>
                 </a:solidFill>
-                <a:latin typeface="Yu Gothic"/>
               </a:defRPr>
             </a:pPr>
             <a:r>
+              <a:rPr>
+                <a:latin typeface="Meiryo"/>
+                <a:ea typeface="Meiryo"/>
+                <a:cs typeface="Meiryo"/>
+              </a:rPr>
               <a:t>60.7%</a:t>
             </a:r>
           </a:p>
@@ -3610,8 +3691,8 @@
         </p:nvSpPr>
         <p:spPr>
           <a:xfrm>
-            <a:off x="731520" y="3291840"/>
-            <a:ext cx="2286000" cy="1463040"/>
+            <a:off x="777240" y="3200400"/>
+            <a:ext cx="2194560" cy="548640"/>
           </a:xfrm>
           <a:prstGeom prst="rect">
             <a:avLst/>
@@ -3619,24 +3700,70 @@
           <a:noFill/>
         </p:spPr>
         <p:txBody>
-          <a:bodyPr wrap="square">
-            <a:spAutoFit/>
+          <a:bodyPr wrap="square" lIns="0" rIns="0" anchor="t">
+            <a:noAutofit/>
           </a:bodyPr>
           <a:lstStyle/>
           <a:p>
             <a:pPr algn="l">
+              <a:lnSpc>
+                <a:spcPct val="115000"/>
+              </a:lnSpc>
               <a:defRPr sz="1300" b="0">
                 <a:solidFill>
                   <a:srgbClr val="333333"/>
                 </a:solidFill>
-                <a:latin typeface="Yu Gothic"/>
               </a:defRPr>
             </a:pPr>
             <a:r>
+              <a:rPr>
+                <a:latin typeface="Meiryo"/>
+                <a:ea typeface="Meiryo"/>
+                <a:cs typeface="Meiryo"/>
+              </a:rPr>
               <a:t>大変1位が自己分析</a:t>
             </a:r>
-            <a:br/>
-            <a:r>
+          </a:p>
+        </p:txBody>
+      </p:sp>
+      <p:sp>
+        <p:nvSpPr>
+          <p:cNvPr id="8" name="TextBox 7"/>
+          <p:cNvSpPr txBox="1"/>
+          <p:nvPr/>
+        </p:nvSpPr>
+        <p:spPr>
+          <a:xfrm>
+            <a:off x="777240" y="3794760"/>
+            <a:ext cx="2194560" cy="457200"/>
+          </a:xfrm>
+          <a:prstGeom prst="rect">
+            <a:avLst/>
+          </a:prstGeom>
+          <a:noFill/>
+        </p:spPr>
+        <p:txBody>
+          <a:bodyPr wrap="square" lIns="0" rIns="0" anchor="t">
+            <a:noAutofit/>
+          </a:bodyPr>
+          <a:lstStyle/>
+          <a:p>
+            <a:pPr algn="l">
+              <a:lnSpc>
+                <a:spcPct val="115000"/>
+              </a:lnSpc>
+              <a:defRPr sz="1100" b="0">
+                <a:solidFill>
+                  <a:srgbClr val="6B6F6B"/>
+                </a:solidFill>
+              </a:defRPr>
+            </a:pPr>
+            <a:r>
+              <a:rPr>
+                <a:latin typeface="Meiryo"/>
+                <a:ea typeface="Meiryo"/>
+                <a:cs typeface="Meiryo"/>
+              </a:rPr>
               <a:t>学情 26卒 n=275</a:t>
             </a:r>
           </a:p>
@@ -3644,22 +3771,24 @@
       </p:sp>
       <p:sp>
         <p:nvSpPr>
-          <p:cNvPr id="8" name="Rounded Rectangle 7"/>
+          <p:cNvPr id="9" name="Rounded Rectangle 8"/>
           <p:cNvSpPr/>
           <p:nvPr/>
         </p:nvSpPr>
         <p:spPr>
           <a:xfrm>
-            <a:off x="3429000" y="2194560"/>
-            <a:ext cx="2651760" cy="3291840"/>
+            <a:off x="3429000" y="2057400"/>
+            <a:ext cx="2651760" cy="3383280"/>
           </a:xfrm>
           <a:prstGeom prst="roundRect">
-            <a:avLst/>
+            <a:avLst>
+              <a:gd name="adj" fmla="val 12000"/>
+            </a:avLst>
           </a:prstGeom>
           <a:solidFill>
             <a:srgbClr val="FFFFFF"/>
           </a:solidFill>
-          <a:ln w="12700">
+          <a:ln w="15875">
             <a:solidFill>
               <a:srgbClr val="E5E1D8"/>
             </a:solidFill>
@@ -3689,14 +3818,14 @@
       </p:sp>
       <p:sp>
         <p:nvSpPr>
-          <p:cNvPr id="9" name="TextBox 8"/>
+          <p:cNvPr id="10" name="TextBox 9"/>
           <p:cNvSpPr txBox="1"/>
           <p:nvPr/>
         </p:nvSpPr>
         <p:spPr>
           <a:xfrm>
-            <a:off x="3611880" y="2377440"/>
-            <a:ext cx="2286000" cy="822960"/>
+            <a:off x="3657600" y="2286000"/>
+            <a:ext cx="2194560" cy="822960"/>
           </a:xfrm>
           <a:prstGeom prst="rect">
             <a:avLst/>
@@ -3704,20 +3833,27 @@
           <a:noFill/>
         </p:spPr>
         <p:txBody>
-          <a:bodyPr wrap="square">
-            <a:spAutoFit/>
+          <a:bodyPr wrap="square" lIns="0" rIns="0" anchor="t">
+            <a:noAutofit/>
           </a:bodyPr>
           <a:lstStyle/>
           <a:p>
             <a:pPr algn="l">
-              <a:defRPr sz="3600" b="1">
+              <a:lnSpc>
+                <a:spcPct val="115000"/>
+              </a:lnSpc>
+              <a:defRPr sz="3400" b="1">
                 <a:solidFill>
                   <a:srgbClr val="111311"/>
                 </a:solidFill>
-                <a:latin typeface="Yu Gothic"/>
               </a:defRPr>
             </a:pPr>
             <a:r>
+              <a:rPr>
+                <a:latin typeface="Meiryo"/>
+                <a:ea typeface="Meiryo"/>
+                <a:cs typeface="Meiryo"/>
+              </a:rPr>
               <a:t>35.2%</a:t>
             </a:r>
           </a:p>
@@ -3725,14 +3861,14 @@
       </p:sp>
       <p:sp>
         <p:nvSpPr>
-          <p:cNvPr id="10" name="TextBox 9"/>
+          <p:cNvPr id="11" name="TextBox 10"/>
           <p:cNvSpPr txBox="1"/>
           <p:nvPr/>
         </p:nvSpPr>
         <p:spPr>
           <a:xfrm>
-            <a:off x="3611880" y="3291840"/>
-            <a:ext cx="2286000" cy="1463040"/>
+            <a:off x="3657600" y="3200400"/>
+            <a:ext cx="2194560" cy="548640"/>
           </a:xfrm>
           <a:prstGeom prst="rect">
             <a:avLst/>
@@ -3740,24 +3876,70 @@
           <a:noFill/>
         </p:spPr>
         <p:txBody>
-          <a:bodyPr wrap="square">
-            <a:spAutoFit/>
+          <a:bodyPr wrap="square" lIns="0" rIns="0" anchor="t">
+            <a:noAutofit/>
           </a:bodyPr>
           <a:lstStyle/>
           <a:p>
             <a:pPr algn="l">
+              <a:lnSpc>
+                <a:spcPct val="115000"/>
+              </a:lnSpc>
               <a:defRPr sz="1300" b="0">
                 <a:solidFill>
                   <a:srgbClr val="333333"/>
                 </a:solidFill>
-                <a:latin typeface="Yu Gothic"/>
               </a:defRPr>
             </a:pPr>
             <a:r>
+              <a:rPr>
+                <a:latin typeface="Meiryo"/>
+                <a:ea typeface="Meiryo"/>
+                <a:cs typeface="Meiryo"/>
+              </a:rPr>
               <a:t>9月も自己分析に逆戻り</a:t>
             </a:r>
-            <a:br/>
-            <a:r>
+          </a:p>
+        </p:txBody>
+      </p:sp>
+      <p:sp>
+        <p:nvSpPr>
+          <p:cNvPr id="12" name="TextBox 11"/>
+          <p:cNvSpPr txBox="1"/>
+          <p:nvPr/>
+        </p:nvSpPr>
+        <p:spPr>
+          <a:xfrm>
+            <a:off x="3657600" y="3794760"/>
+            <a:ext cx="2194560" cy="457200"/>
+          </a:xfrm>
+          <a:prstGeom prst="rect">
+            <a:avLst/>
+          </a:prstGeom>
+          <a:noFill/>
+        </p:spPr>
+        <p:txBody>
+          <a:bodyPr wrap="square" lIns="0" rIns="0" anchor="t">
+            <a:noAutofit/>
+          </a:bodyPr>
+          <a:lstStyle/>
+          <a:p>
+            <a:pPr algn="l">
+              <a:lnSpc>
+                <a:spcPct val="115000"/>
+              </a:lnSpc>
+              <a:defRPr sz="1100" b="0">
+                <a:solidFill>
+                  <a:srgbClr val="6B6F6B"/>
+                </a:solidFill>
+              </a:defRPr>
+            </a:pPr>
+            <a:r>
+              <a:rPr>
+                <a:latin typeface="Meiryo"/>
+                <a:ea typeface="Meiryo"/>
+                <a:cs typeface="Meiryo"/>
+              </a:rPr>
               <a:t>マイナビ n=1268</a:t>
             </a:r>
           </a:p>
@@ -3765,22 +3947,24 @@
       </p:sp>
       <p:sp>
         <p:nvSpPr>
-          <p:cNvPr id="11" name="Rounded Rectangle 10"/>
+          <p:cNvPr id="13" name="Rounded Rectangle 12"/>
           <p:cNvSpPr/>
           <p:nvPr/>
         </p:nvSpPr>
         <p:spPr>
           <a:xfrm>
-            <a:off x="6309359" y="2194560"/>
-            <a:ext cx="2651760" cy="3291840"/>
+            <a:off x="6309359" y="2057400"/>
+            <a:ext cx="2651760" cy="3383280"/>
           </a:xfrm>
           <a:prstGeom prst="roundRect">
-            <a:avLst/>
+            <a:avLst>
+              <a:gd name="adj" fmla="val 12000"/>
+            </a:avLst>
           </a:prstGeom>
           <a:solidFill>
             <a:srgbClr val="FFFFFF"/>
           </a:solidFill>
-          <a:ln w="12700">
+          <a:ln w="15875">
             <a:solidFill>
               <a:srgbClr val="E5E1D8"/>
             </a:solidFill>
@@ -3810,14 +3994,14 @@
       </p:sp>
       <p:sp>
         <p:nvSpPr>
-          <p:cNvPr id="12" name="TextBox 11"/>
+          <p:cNvPr id="14" name="TextBox 13"/>
           <p:cNvSpPr txBox="1"/>
           <p:nvPr/>
         </p:nvSpPr>
         <p:spPr>
           <a:xfrm>
-            <a:off x="6492240" y="2377440"/>
-            <a:ext cx="2286000" cy="822960"/>
+            <a:off x="6537959" y="2286000"/>
+            <a:ext cx="2194560" cy="822960"/>
           </a:xfrm>
           <a:prstGeom prst="rect">
             <a:avLst/>
@@ -3825,20 +4009,27 @@
           <a:noFill/>
         </p:spPr>
         <p:txBody>
-          <a:bodyPr wrap="square">
-            <a:spAutoFit/>
+          <a:bodyPr wrap="square" lIns="0" rIns="0" anchor="t">
+            <a:noAutofit/>
           </a:bodyPr>
           <a:lstStyle/>
           <a:p>
             <a:pPr algn="l">
-              <a:defRPr sz="3600" b="1">
+              <a:lnSpc>
+                <a:spcPct val="115000"/>
+              </a:lnSpc>
+              <a:defRPr sz="3400" b="1">
                 <a:solidFill>
                   <a:srgbClr val="111311"/>
                 </a:solidFill>
-                <a:latin typeface="Yu Gothic"/>
               </a:defRPr>
             </a:pPr>
             <a:r>
+              <a:rPr>
+                <a:latin typeface="Meiryo"/>
+                <a:ea typeface="Meiryo"/>
+                <a:cs typeface="Meiryo"/>
+              </a:rPr>
               <a:t>93.8%</a:t>
             </a:r>
           </a:p>
@@ -3846,14 +4037,14 @@
       </p:sp>
       <p:sp>
         <p:nvSpPr>
-          <p:cNvPr id="13" name="TextBox 12"/>
+          <p:cNvPr id="15" name="TextBox 14"/>
           <p:cNvSpPr txBox="1"/>
           <p:nvPr/>
         </p:nvSpPr>
         <p:spPr>
           <a:xfrm>
-            <a:off x="6492240" y="3291840"/>
-            <a:ext cx="2286000" cy="1463040"/>
+            <a:off x="6537959" y="3200400"/>
+            <a:ext cx="2194560" cy="548640"/>
           </a:xfrm>
           <a:prstGeom prst="rect">
             <a:avLst/>
@@ -3861,24 +4052,70 @@
           <a:noFill/>
         </p:spPr>
         <p:txBody>
-          <a:bodyPr wrap="square">
-            <a:spAutoFit/>
+          <a:bodyPr wrap="square" lIns="0" rIns="0" anchor="t">
+            <a:noAutofit/>
           </a:bodyPr>
           <a:lstStyle/>
           <a:p>
             <a:pPr algn="l">
+              <a:lnSpc>
+                <a:spcPct val="115000"/>
+              </a:lnSpc>
               <a:defRPr sz="1300" b="0">
                 <a:solidFill>
                   <a:srgbClr val="333333"/>
                 </a:solidFill>
-                <a:latin typeface="Yu Gothic"/>
               </a:defRPr>
             </a:pPr>
             <a:r>
+              <a:rPr>
+                <a:latin typeface="Meiryo"/>
+                <a:ea typeface="Meiryo"/>
+                <a:cs typeface="Meiryo"/>
+              </a:rPr>
               <a:t>人柄を重視する企業</a:t>
             </a:r>
-            <a:br/>
-            <a:r>
+          </a:p>
+        </p:txBody>
+      </p:sp>
+      <p:sp>
+        <p:nvSpPr>
+          <p:cNvPr id="16" name="TextBox 15"/>
+          <p:cNvSpPr txBox="1"/>
+          <p:nvPr/>
+        </p:nvSpPr>
+        <p:spPr>
+          <a:xfrm>
+            <a:off x="6537959" y="3794760"/>
+            <a:ext cx="2194560" cy="457200"/>
+          </a:xfrm>
+          <a:prstGeom prst="rect">
+            <a:avLst/>
+          </a:prstGeom>
+          <a:noFill/>
+        </p:spPr>
+        <p:txBody>
+          <a:bodyPr wrap="square" lIns="0" rIns="0" anchor="t">
+            <a:noAutofit/>
+          </a:bodyPr>
+          <a:lstStyle/>
+          <a:p>
+            <a:pPr algn="l">
+              <a:lnSpc>
+                <a:spcPct val="115000"/>
+              </a:lnSpc>
+              <a:defRPr sz="1100" b="0">
+                <a:solidFill>
+                  <a:srgbClr val="6B6F6B"/>
+                </a:solidFill>
+              </a:defRPr>
+            </a:pPr>
+            <a:r>
+              <a:rPr>
+                <a:latin typeface="Meiryo"/>
+                <a:ea typeface="Meiryo"/>
+                <a:cs typeface="Meiryo"/>
+              </a:rPr>
               <a:t>白書 n=1182社</a:t>
             </a:r>
           </a:p>
@@ -3886,22 +4123,24 @@
       </p:sp>
       <p:sp>
         <p:nvSpPr>
-          <p:cNvPr id="14" name="Rounded Rectangle 13"/>
+          <p:cNvPr id="17" name="Rounded Rectangle 16"/>
           <p:cNvSpPr/>
           <p:nvPr/>
         </p:nvSpPr>
         <p:spPr>
           <a:xfrm>
-            <a:off x="9189719" y="2194560"/>
-            <a:ext cx="2651760" cy="3291840"/>
+            <a:off x="9189719" y="2057400"/>
+            <a:ext cx="2651760" cy="3383280"/>
           </a:xfrm>
           <a:prstGeom prst="roundRect">
-            <a:avLst/>
+            <a:avLst>
+              <a:gd name="adj" fmla="val 12000"/>
+            </a:avLst>
           </a:prstGeom>
           <a:solidFill>
             <a:srgbClr val="FFFFFF"/>
           </a:solidFill>
-          <a:ln w="12700">
+          <a:ln w="15875">
             <a:solidFill>
               <a:srgbClr val="E5E1D8"/>
             </a:solidFill>
@@ -3931,14 +4170,14 @@
       </p:sp>
       <p:sp>
         <p:nvSpPr>
-          <p:cNvPr id="15" name="TextBox 14"/>
+          <p:cNvPr id="18" name="TextBox 17"/>
           <p:cNvSpPr txBox="1"/>
           <p:nvPr/>
         </p:nvSpPr>
         <p:spPr>
           <a:xfrm>
-            <a:off x="9372599" y="2377440"/>
-            <a:ext cx="2286000" cy="822960"/>
+            <a:off x="9418319" y="2286000"/>
+            <a:ext cx="2194560" cy="822960"/>
           </a:xfrm>
           <a:prstGeom prst="rect">
             <a:avLst/>
@@ -3946,20 +4185,27 @@
           <a:noFill/>
         </p:spPr>
         <p:txBody>
-          <a:bodyPr wrap="square">
-            <a:spAutoFit/>
+          <a:bodyPr wrap="square" lIns="0" rIns="0" anchor="t">
+            <a:noAutofit/>
           </a:bodyPr>
           <a:lstStyle/>
           <a:p>
             <a:pPr algn="l">
-              <a:defRPr sz="3600" b="1">
+              <a:lnSpc>
+                <a:spcPct val="115000"/>
+              </a:lnSpc>
+              <a:defRPr sz="3400" b="1">
                 <a:solidFill>
                   <a:srgbClr val="111311"/>
                 </a:solidFill>
-                <a:latin typeface="Yu Gothic"/>
               </a:defRPr>
             </a:pPr>
             <a:r>
+              <a:rPr>
+                <a:latin typeface="Meiryo"/>
+                <a:ea typeface="Meiryo"/>
+                <a:cs typeface="Meiryo"/>
+              </a:rPr>
               <a:t>40%</a:t>
             </a:r>
           </a:p>
@@ -3967,14 +4213,14 @@
       </p:sp>
       <p:sp>
         <p:nvSpPr>
-          <p:cNvPr id="16" name="TextBox 15"/>
+          <p:cNvPr id="19" name="TextBox 18"/>
           <p:cNvSpPr txBox="1"/>
           <p:nvPr/>
         </p:nvSpPr>
         <p:spPr>
           <a:xfrm>
-            <a:off x="9372599" y="3291840"/>
-            <a:ext cx="2286000" cy="1463040"/>
+            <a:off x="9418319" y="3200400"/>
+            <a:ext cx="2194560" cy="548640"/>
           </a:xfrm>
           <a:prstGeom prst="rect">
             <a:avLst/>
@@ -3982,39 +4228,42 @@
           <a:noFill/>
         </p:spPr>
         <p:txBody>
-          <a:bodyPr wrap="square">
-            <a:spAutoFit/>
+          <a:bodyPr wrap="square" lIns="0" rIns="0" anchor="t">
+            <a:noAutofit/>
           </a:bodyPr>
           <a:lstStyle/>
           <a:p>
             <a:pPr algn="l">
+              <a:lnSpc>
+                <a:spcPct val="115000"/>
+              </a:lnSpc>
               <a:defRPr sz="1300" b="0">
                 <a:solidFill>
                   <a:srgbClr val="333333"/>
                 </a:solidFill>
-                <a:latin typeface="Yu Gothic"/>
               </a:defRPr>
             </a:pPr>
             <a:r>
+              <a:rPr>
+                <a:latin typeface="Meiryo"/>
+                <a:ea typeface="Meiryo"/>
+                <a:cs typeface="Meiryo"/>
+              </a:rPr>
               <a:t>入社後ギャップ</a:t>
             </a:r>
-            <a:br/>
-            <a:r>
-              <a:t>社会人 n=124</a:t>
-            </a:r>
-          </a:p>
-        </p:txBody>
-      </p:sp>
-      <p:sp>
-        <p:nvSpPr>
-          <p:cNvPr id="17" name="TextBox 16"/>
+          </a:p>
+        </p:txBody>
+      </p:sp>
+      <p:sp>
+        <p:nvSpPr>
+          <p:cNvPr id="20" name="TextBox 19"/>
           <p:cNvSpPr txBox="1"/>
           <p:nvPr/>
         </p:nvSpPr>
         <p:spPr>
           <a:xfrm>
-            <a:off x="548640" y="5943600"/>
-            <a:ext cx="10972800" cy="365760"/>
+            <a:off x="9418319" y="3794760"/>
+            <a:ext cx="2194560" cy="457200"/>
           </a:xfrm>
           <a:prstGeom prst="rect">
             <a:avLst/>
@@ -4022,20 +4271,70 @@
           <a:noFill/>
         </p:spPr>
         <p:txBody>
-          <a:bodyPr wrap="square">
-            <a:spAutoFit/>
+          <a:bodyPr wrap="square" lIns="0" rIns="0" anchor="t">
+            <a:noAutofit/>
           </a:bodyPr>
           <a:lstStyle/>
           <a:p>
             <a:pPr algn="l">
+              <a:lnSpc>
+                <a:spcPct val="115000"/>
+              </a:lnSpc>
+              <a:defRPr sz="1100" b="0">
+                <a:solidFill>
+                  <a:srgbClr val="6B6F6B"/>
+                </a:solidFill>
+              </a:defRPr>
+            </a:pPr>
+            <a:r>
+              <a:rPr>
+                <a:latin typeface="Meiryo"/>
+                <a:ea typeface="Meiryo"/>
+                <a:cs typeface="Meiryo"/>
+              </a:rPr>
+              <a:t>社会人 n=124</a:t>
+            </a:r>
+          </a:p>
+        </p:txBody>
+      </p:sp>
+      <p:sp>
+        <p:nvSpPr>
+          <p:cNvPr id="21" name="TextBox 20"/>
+          <p:cNvSpPr txBox="1"/>
+          <p:nvPr/>
+        </p:nvSpPr>
+        <p:spPr>
+          <a:xfrm>
+            <a:off x="548640" y="5806440"/>
+            <a:ext cx="11064240" cy="365760"/>
+          </a:xfrm>
+          <a:prstGeom prst="rect">
+            <a:avLst/>
+          </a:prstGeom>
+          <a:noFill/>
+        </p:spPr>
+        <p:txBody>
+          <a:bodyPr wrap="square" lIns="0" rIns="0" anchor="t">
+            <a:noAutofit/>
+          </a:bodyPr>
+          <a:lstStyle/>
+          <a:p>
+            <a:pPr algn="l">
+              <a:lnSpc>
+                <a:spcPct val="115000"/>
+              </a:lnSpc>
               <a:defRPr sz="1000" b="0">
                 <a:solidFill>
                   <a:srgbClr val="6B6F6B"/>
                 </a:solidFill>
-                <a:latin typeface="Yu Gothic"/>
               </a:defRPr>
             </a:pPr>
             <a:r>
+              <a:rPr>
+                <a:latin typeface="Meiryo"/>
+                <a:ea typeface="Meiryo"/>
+                <a:cs typeface="Meiryo"/>
+              </a:rPr>
               <a:t>出典：各社公表資料（Webデータ集にリンク集約）</a:t>
             </a:r>
           </a:p>
@@ -4075,8 +4374,8 @@
         </p:nvSpPr>
         <p:spPr>
           <a:xfrm>
-            <a:off x="548640" y="182880"/>
-            <a:ext cx="10972800" cy="365760"/>
+            <a:off x="548640" y="228600"/>
+            <a:ext cx="11064240" cy="365760"/>
           </a:xfrm>
           <a:prstGeom prst="rect">
             <a:avLst/>
@@ -4084,20 +4383,27 @@
           <a:noFill/>
         </p:spPr>
         <p:txBody>
-          <a:bodyPr wrap="square">
-            <a:spAutoFit/>
+          <a:bodyPr wrap="square" lIns="0" rIns="0" anchor="t">
+            <a:noAutofit/>
           </a:bodyPr>
           <a:lstStyle/>
           <a:p>
             <a:pPr algn="l">
+              <a:lnSpc>
+                <a:spcPct val="115000"/>
+              </a:lnSpc>
               <a:defRPr sz="1200" b="0">
                 <a:solidFill>
                   <a:srgbClr val="6B6F6B"/>
                 </a:solidFill>
-                <a:latin typeface="Yu Gothic"/>
               </a:defRPr>
             </a:pPr>
             <a:r>
+              <a:rPr>
+                <a:latin typeface="Meiryo"/>
+                <a:ea typeface="Meiryo"/>
+                <a:cs typeface="Meiryo"/>
+              </a:rPr>
               <a:t>(02) データで見る現状 — 4つの事実</a:t>
             </a:r>
           </a:p>
@@ -4111,8 +4417,8 @@
         </p:nvSpPr>
         <p:spPr>
           <a:xfrm>
-            <a:off x="548640" y="548640"/>
-            <a:ext cx="10972800" cy="822960"/>
+            <a:off x="548640" y="594360"/>
+            <a:ext cx="11064240" cy="822960"/>
           </a:xfrm>
           <a:prstGeom prst="rect">
             <a:avLst/>
@@ -4120,20 +4426,27 @@
           <a:noFill/>
         </p:spPr>
         <p:txBody>
-          <a:bodyPr wrap="square">
-            <a:spAutoFit/>
+          <a:bodyPr wrap="square" lIns="0" rIns="0" anchor="t">
+            <a:noAutofit/>
           </a:bodyPr>
           <a:lstStyle/>
           <a:p>
             <a:pPr algn="l">
-              <a:defRPr sz="3600" b="1">
+              <a:lnSpc>
+                <a:spcPct val="115000"/>
+              </a:lnSpc>
+              <a:defRPr sz="3200" b="1">
                 <a:solidFill>
                   <a:srgbClr val="111311"/>
                 </a:solidFill>
-                <a:latin typeface="Yu Gothic"/>
               </a:defRPr>
             </a:pPr>
             <a:r>
+              <a:rPr>
+                <a:latin typeface="Meiryo"/>
+                <a:ea typeface="Meiryo"/>
+                <a:cs typeface="Meiryo"/>
+              </a:rPr>
               <a:t>数字が語る、4つの事実。</a:t>
             </a:r>
           </a:p>
@@ -4147,16 +4460,18 @@
         </p:nvSpPr>
         <p:spPr>
           <a:xfrm>
-            <a:off x="548640" y="1645920"/>
-            <a:ext cx="2651760" cy="4023360"/>
+            <a:off x="548640" y="1600200"/>
+            <a:ext cx="2651760" cy="4114800"/>
           </a:xfrm>
           <a:prstGeom prst="roundRect">
-            <a:avLst/>
+            <a:avLst>
+              <a:gd name="adj" fmla="val 12000"/>
+            </a:avLst>
           </a:prstGeom>
           <a:solidFill>
             <a:srgbClr val="FFFFFF"/>
           </a:solidFill>
-          <a:ln w="12700">
+          <a:ln w="15875">
             <a:solidFill>
               <a:srgbClr val="E5E1D8"/>
             </a:solidFill>
@@ -4192,8 +4507,8 @@
         </p:nvSpPr>
         <p:spPr>
           <a:xfrm>
-            <a:off x="731520" y="1828800"/>
-            <a:ext cx="2286000" cy="365760"/>
+            <a:off x="777240" y="1828800"/>
+            <a:ext cx="2194560" cy="365760"/>
           </a:xfrm>
           <a:prstGeom prst="rect">
             <a:avLst/>
@@ -4201,20 +4516,27 @@
           <a:noFill/>
         </p:spPr>
         <p:txBody>
-          <a:bodyPr wrap="square">
-            <a:spAutoFit/>
+          <a:bodyPr wrap="square" lIns="0" rIns="0" anchor="t">
+            <a:noAutofit/>
           </a:bodyPr>
           <a:lstStyle/>
           <a:p>
             <a:pPr algn="l">
+              <a:lnSpc>
+                <a:spcPct val="115000"/>
+              </a:lnSpc>
               <a:defRPr sz="1100" b="0">
                 <a:solidFill>
                   <a:srgbClr val="6B6F6B"/>
                 </a:solidFill>
-                <a:latin typeface="Yu Gothic"/>
               </a:defRPr>
             </a:pPr>
             <a:r>
+              <a:rPr>
+                <a:latin typeface="Meiryo"/>
+                <a:ea typeface="Meiryo"/>
+                <a:cs typeface="Meiryo"/>
+              </a:rPr>
               <a:t>01 / 学情</a:t>
             </a:r>
           </a:p>
@@ -4228,8 +4550,8 @@
         </p:nvSpPr>
         <p:spPr>
           <a:xfrm>
-            <a:off x="731520" y="2286000"/>
-            <a:ext cx="2286000" cy="822960"/>
+            <a:off x="777240" y="2286000"/>
+            <a:ext cx="2194560" cy="731520"/>
           </a:xfrm>
           <a:prstGeom prst="rect">
             <a:avLst/>
@@ -4237,20 +4559,27 @@
           <a:noFill/>
         </p:spPr>
         <p:txBody>
-          <a:bodyPr wrap="square">
-            <a:spAutoFit/>
+          <a:bodyPr wrap="square" lIns="0" rIns="0" anchor="t">
+            <a:noAutofit/>
           </a:bodyPr>
           <a:lstStyle/>
           <a:p>
             <a:pPr algn="l">
-              <a:defRPr sz="2400" b="1">
+              <a:lnSpc>
+                <a:spcPct val="115000"/>
+              </a:lnSpc>
+              <a:defRPr sz="2100" b="1">
                 <a:solidFill>
                   <a:srgbClr val="111311"/>
                 </a:solidFill>
-                <a:latin typeface="Yu Gothic"/>
               </a:defRPr>
             </a:pPr>
             <a:r>
+              <a:rPr>
+                <a:latin typeface="Meiryo"/>
+                <a:ea typeface="Meiryo"/>
+                <a:cs typeface="Meiryo"/>
+              </a:rPr>
               <a:t>60.7% / 46.5%</a:t>
             </a:r>
           </a:p>
@@ -4264,8 +4593,8 @@
         </p:nvSpPr>
         <p:spPr>
           <a:xfrm>
-            <a:off x="731520" y="3200400"/>
-            <a:ext cx="2286000" cy="914400"/>
+            <a:off x="777240" y="3200400"/>
+            <a:ext cx="2194560" cy="1097280"/>
           </a:xfrm>
           <a:prstGeom prst="rect">
             <a:avLst/>
@@ -4273,21 +4602,37 @@
           <a:noFill/>
         </p:spPr>
         <p:txBody>
-          <a:bodyPr wrap="square">
-            <a:spAutoFit/>
+          <a:bodyPr wrap="square" lIns="0" rIns="0" anchor="t">
+            <a:noAutofit/>
           </a:bodyPr>
           <a:lstStyle/>
           <a:p>
             <a:pPr algn="l">
-              <a:defRPr sz="1300" b="0">
+              <a:lnSpc>
+                <a:spcPct val="115000"/>
+              </a:lnSpc>
+              <a:defRPr sz="1200" b="0">
                 <a:solidFill>
                   <a:srgbClr val="333333"/>
                 </a:solidFill>
-                <a:latin typeface="Yu Gothic"/>
               </a:defRPr>
             </a:pPr>
             <a:r>
-              <a:t>大変1位も良かった1位も自己分析</a:t>
+              <a:rPr>
+                <a:latin typeface="Meiryo"/>
+                <a:ea typeface="Meiryo"/>
+                <a:cs typeface="Meiryo"/>
+              </a:rPr>
+              <a:t>大変1位も良かった1位も</a:t>
+            </a:r>
+            <a:br/>
+            <a:r>
+              <a:rPr>
+                <a:latin typeface="Meiryo"/>
+                <a:ea typeface="Meiryo"/>
+                <a:cs typeface="Meiryo"/>
+              </a:rPr>
+              <a:t>自己分析</a:t>
             </a:r>
           </a:p>
         </p:txBody>
@@ -4300,8 +4645,8 @@
         </p:nvSpPr>
         <p:spPr>
           <a:xfrm>
-            <a:off x="731520" y="4846320"/>
-            <a:ext cx="2286000" cy="457200"/>
+            <a:off x="777240" y="5029200"/>
+            <a:ext cx="2194560" cy="365760"/>
           </a:xfrm>
           <a:prstGeom prst="rect">
             <a:avLst/>
@@ -4309,20 +4654,27 @@
           <a:noFill/>
         </p:spPr>
         <p:txBody>
-          <a:bodyPr wrap="square">
-            <a:spAutoFit/>
+          <a:bodyPr wrap="square" lIns="0" rIns="0" anchor="t">
+            <a:noAutofit/>
           </a:bodyPr>
           <a:lstStyle/>
           <a:p>
             <a:pPr algn="l">
+              <a:lnSpc>
+                <a:spcPct val="115000"/>
+              </a:lnSpc>
               <a:defRPr sz="1000" b="0">
                 <a:solidFill>
                   <a:srgbClr val="6B6F6B"/>
                 </a:solidFill>
-                <a:latin typeface="Yu Gothic"/>
               </a:defRPr>
             </a:pPr>
             <a:r>
+              <a:rPr>
+                <a:latin typeface="Meiryo"/>
+                <a:ea typeface="Meiryo"/>
+                <a:cs typeface="Meiryo"/>
+              </a:rPr>
               <a:t>出典はWeb参照</a:t>
             </a:r>
           </a:p>
@@ -4336,16 +4688,18 @@
         </p:nvSpPr>
         <p:spPr>
           <a:xfrm>
-            <a:off x="3429000" y="1645920"/>
-            <a:ext cx="2651760" cy="4023360"/>
+            <a:off x="3429000" y="1600200"/>
+            <a:ext cx="2651760" cy="4114800"/>
           </a:xfrm>
           <a:prstGeom prst="roundRect">
-            <a:avLst/>
+            <a:avLst>
+              <a:gd name="adj" fmla="val 12000"/>
+            </a:avLst>
           </a:prstGeom>
           <a:solidFill>
             <a:srgbClr val="FFFFFF"/>
           </a:solidFill>
-          <a:ln w="12700">
+          <a:ln w="15875">
             <a:solidFill>
               <a:srgbClr val="E5E1D8"/>
             </a:solidFill>
@@ -4381,8 +4735,8 @@
         </p:nvSpPr>
         <p:spPr>
           <a:xfrm>
-            <a:off x="3611880" y="1828800"/>
-            <a:ext cx="2286000" cy="365760"/>
+            <a:off x="3657600" y="1828800"/>
+            <a:ext cx="2194560" cy="365760"/>
           </a:xfrm>
           <a:prstGeom prst="rect">
             <a:avLst/>
@@ -4390,20 +4744,27 @@
           <a:noFill/>
         </p:spPr>
         <p:txBody>
-          <a:bodyPr wrap="square">
-            <a:spAutoFit/>
+          <a:bodyPr wrap="square" lIns="0" rIns="0" anchor="t">
+            <a:noAutofit/>
           </a:bodyPr>
           <a:lstStyle/>
           <a:p>
             <a:pPr algn="l">
+              <a:lnSpc>
+                <a:spcPct val="115000"/>
+              </a:lnSpc>
               <a:defRPr sz="1100" b="0">
                 <a:solidFill>
                   <a:srgbClr val="6B6F6B"/>
                 </a:solidFill>
-                <a:latin typeface="Yu Gothic"/>
               </a:defRPr>
             </a:pPr>
             <a:r>
+              <a:rPr>
+                <a:latin typeface="Meiryo"/>
+                <a:ea typeface="Meiryo"/>
+                <a:cs typeface="Meiryo"/>
+              </a:rPr>
               <a:t>02 / マイナビ×doda</a:t>
             </a:r>
           </a:p>
@@ -4417,8 +4778,8 @@
         </p:nvSpPr>
         <p:spPr>
           <a:xfrm>
-            <a:off x="3611880" y="2286000"/>
-            <a:ext cx="2286000" cy="822960"/>
+            <a:off x="3657600" y="2286000"/>
+            <a:ext cx="2194560" cy="731520"/>
           </a:xfrm>
           <a:prstGeom prst="rect">
             <a:avLst/>
@@ -4426,20 +4787,27 @@
           <a:noFill/>
         </p:spPr>
         <p:txBody>
-          <a:bodyPr wrap="square">
-            <a:spAutoFit/>
+          <a:bodyPr wrap="square" lIns="0" rIns="0" anchor="t">
+            <a:noAutofit/>
           </a:bodyPr>
           <a:lstStyle/>
           <a:p>
             <a:pPr algn="l">
-              <a:defRPr sz="2400" b="1">
+              <a:lnSpc>
+                <a:spcPct val="115000"/>
+              </a:lnSpc>
+              <a:defRPr sz="2100" b="1">
                 <a:solidFill>
                   <a:srgbClr val="111311"/>
                 </a:solidFill>
-                <a:latin typeface="Yu Gothic"/>
               </a:defRPr>
             </a:pPr>
             <a:r>
+              <a:rPr>
+                <a:latin typeface="Meiryo"/>
+                <a:ea typeface="Meiryo"/>
+                <a:cs typeface="Meiryo"/>
+              </a:rPr>
               <a:t>35.2% / 42.6%</a:t>
             </a:r>
           </a:p>
@@ -4453,8 +4821,8 @@
         </p:nvSpPr>
         <p:spPr>
           <a:xfrm>
-            <a:off x="3611880" y="3200400"/>
-            <a:ext cx="2286000" cy="914400"/>
+            <a:off x="3657600" y="3200400"/>
+            <a:ext cx="2194560" cy="1097280"/>
           </a:xfrm>
           <a:prstGeom prst="rect">
             <a:avLst/>
@@ -4462,21 +4830,37 @@
           <a:noFill/>
         </p:spPr>
         <p:txBody>
-          <a:bodyPr wrap="square">
-            <a:spAutoFit/>
+          <a:bodyPr wrap="square" lIns="0" rIns="0" anchor="t">
+            <a:noAutofit/>
           </a:bodyPr>
           <a:lstStyle/>
           <a:p>
             <a:pPr algn="l">
-              <a:defRPr sz="1300" b="0">
+              <a:lnSpc>
+                <a:spcPct val="115000"/>
+              </a:lnSpc>
+              <a:defRPr sz="1200" b="0">
                 <a:solidFill>
                   <a:srgbClr val="333333"/>
                 </a:solidFill>
-                <a:latin typeface="Yu Gothic"/>
               </a:defRPr>
             </a:pPr>
             <a:r>
+              <a:rPr>
+                <a:latin typeface="Meiryo"/>
+                <a:ea typeface="Meiryo"/>
+                <a:cs typeface="Meiryo"/>
+              </a:rPr>
               <a:t>秋も土台作りに戻る</a:t>
+            </a:r>
+            <a:br/>
+            <a:r>
+              <a:rPr>
+                <a:latin typeface="Meiryo"/>
+                <a:ea typeface="Meiryo"/>
+                <a:cs typeface="Meiryo"/>
+              </a:rPr>
+              <a:t>9月・ES</a:t>
             </a:r>
           </a:p>
         </p:txBody>
@@ -4489,8 +4873,8 @@
         </p:nvSpPr>
         <p:spPr>
           <a:xfrm>
-            <a:off x="3611880" y="4846320"/>
-            <a:ext cx="2286000" cy="457200"/>
+            <a:off x="3657600" y="5029200"/>
+            <a:ext cx="2194560" cy="365760"/>
           </a:xfrm>
           <a:prstGeom prst="rect">
             <a:avLst/>
@@ -4498,20 +4882,27 @@
           <a:noFill/>
         </p:spPr>
         <p:txBody>
-          <a:bodyPr wrap="square">
-            <a:spAutoFit/>
+          <a:bodyPr wrap="square" lIns="0" rIns="0" anchor="t">
+            <a:noAutofit/>
           </a:bodyPr>
           <a:lstStyle/>
           <a:p>
             <a:pPr algn="l">
+              <a:lnSpc>
+                <a:spcPct val="115000"/>
+              </a:lnSpc>
               <a:defRPr sz="1000" b="0">
                 <a:solidFill>
                   <a:srgbClr val="6B6F6B"/>
                 </a:solidFill>
-                <a:latin typeface="Yu Gothic"/>
               </a:defRPr>
             </a:pPr>
             <a:r>
+              <a:rPr>
+                <a:latin typeface="Meiryo"/>
+                <a:ea typeface="Meiryo"/>
+                <a:cs typeface="Meiryo"/>
+              </a:rPr>
               <a:t>出典はWeb参照</a:t>
             </a:r>
           </a:p>
@@ -4525,16 +4916,18 @@
         </p:nvSpPr>
         <p:spPr>
           <a:xfrm>
-            <a:off x="6309359" y="1645920"/>
-            <a:ext cx="2651760" cy="4023360"/>
+            <a:off x="6309359" y="1600200"/>
+            <a:ext cx="2651760" cy="4114800"/>
           </a:xfrm>
           <a:prstGeom prst="roundRect">
-            <a:avLst/>
+            <a:avLst>
+              <a:gd name="adj" fmla="val 12000"/>
+            </a:avLst>
           </a:prstGeom>
           <a:solidFill>
             <a:srgbClr val="FFFFFF"/>
           </a:solidFill>
-          <a:ln w="12700">
+          <a:ln w="15875">
             <a:solidFill>
               <a:srgbClr val="E5E1D8"/>
             </a:solidFill>
@@ -4570,8 +4963,8 @@
         </p:nvSpPr>
         <p:spPr>
           <a:xfrm>
-            <a:off x="6492240" y="1828800"/>
-            <a:ext cx="2286000" cy="365760"/>
+            <a:off x="6537959" y="1828800"/>
+            <a:ext cx="2194560" cy="365760"/>
           </a:xfrm>
           <a:prstGeom prst="rect">
             <a:avLst/>
@@ -4579,20 +4972,27 @@
           <a:noFill/>
         </p:spPr>
         <p:txBody>
-          <a:bodyPr wrap="square">
-            <a:spAutoFit/>
+          <a:bodyPr wrap="square" lIns="0" rIns="0" anchor="t">
+            <a:noAutofit/>
           </a:bodyPr>
           <a:lstStyle/>
           <a:p>
             <a:pPr algn="l">
+              <a:lnSpc>
+                <a:spcPct val="115000"/>
+              </a:lnSpc>
               <a:defRPr sz="1100" b="0">
                 <a:solidFill>
                   <a:srgbClr val="6B6F6B"/>
                 </a:solidFill>
-                <a:latin typeface="Yu Gothic"/>
               </a:defRPr>
             </a:pPr>
             <a:r>
+              <a:rPr>
+                <a:latin typeface="Meiryo"/>
+                <a:ea typeface="Meiryo"/>
+                <a:cs typeface="Meiryo"/>
+              </a:rPr>
               <a:t>03 / Synergy</a:t>
             </a:r>
           </a:p>
@@ -4606,8 +5006,8 @@
         </p:nvSpPr>
         <p:spPr>
           <a:xfrm>
-            <a:off x="6492240" y="2286000"/>
-            <a:ext cx="2286000" cy="822960"/>
+            <a:off x="6537959" y="2286000"/>
+            <a:ext cx="2194560" cy="731520"/>
           </a:xfrm>
           <a:prstGeom prst="rect">
             <a:avLst/>
@@ -4615,20 +5015,27 @@
           <a:noFill/>
         </p:spPr>
         <p:txBody>
-          <a:bodyPr wrap="square">
-            <a:spAutoFit/>
+          <a:bodyPr wrap="square" lIns="0" rIns="0" anchor="t">
+            <a:noAutofit/>
           </a:bodyPr>
           <a:lstStyle/>
           <a:p>
             <a:pPr algn="l">
-              <a:defRPr sz="2400" b="1">
+              <a:lnSpc>
+                <a:spcPct val="115000"/>
+              </a:lnSpc>
+              <a:defRPr sz="2100" b="1">
                 <a:solidFill>
                   <a:srgbClr val="111311"/>
                 </a:solidFill>
-                <a:latin typeface="Yu Gothic"/>
               </a:defRPr>
             </a:pPr>
             <a:r>
+              <a:rPr>
+                <a:latin typeface="Meiryo"/>
+                <a:ea typeface="Meiryo"/>
+                <a:cs typeface="Meiryo"/>
+              </a:rPr>
               <a:t>53.0% → 30.5%</a:t>
             </a:r>
           </a:p>
@@ -4642,8 +5049,8 @@
         </p:nvSpPr>
         <p:spPr>
           <a:xfrm>
-            <a:off x="6492240" y="3200400"/>
-            <a:ext cx="2286000" cy="914400"/>
+            <a:off x="6537959" y="3200400"/>
+            <a:ext cx="2194560" cy="1097280"/>
           </a:xfrm>
           <a:prstGeom prst="rect">
             <a:avLst/>
@@ -4651,21 +5058,37 @@
           <a:noFill/>
         </p:spPr>
         <p:txBody>
-          <a:bodyPr wrap="square">
-            <a:spAutoFit/>
+          <a:bodyPr wrap="square" lIns="0" rIns="0" anchor="t">
+            <a:noAutofit/>
           </a:bodyPr>
           <a:lstStyle/>
           <a:p>
             <a:pPr algn="l">
-              <a:defRPr sz="1300" b="0">
+              <a:lnSpc>
+                <a:spcPct val="115000"/>
+              </a:lnSpc>
+              <a:defRPr sz="1200" b="0">
                 <a:solidFill>
                   <a:srgbClr val="333333"/>
                 </a:solidFill>
-                <a:latin typeface="Yu Gothic"/>
               </a:defRPr>
             </a:pPr>
             <a:r>
+              <a:rPr>
+                <a:latin typeface="Meiryo"/>
+                <a:ea typeface="Meiryo"/>
+                <a:cs typeface="Meiryo"/>
+              </a:rPr>
               <a:t>試すけど納得できない</a:t>
+            </a:r>
+            <a:br/>
+            <a:r>
+              <a:rPr>
+                <a:latin typeface="Meiryo"/>
+                <a:ea typeface="Meiryo"/>
+                <a:cs typeface="Meiryo"/>
+              </a:rPr>
+              <a:t>信頼のみ30%</a:t>
             </a:r>
           </a:p>
         </p:txBody>
@@ -4678,8 +5101,8 @@
         </p:nvSpPr>
         <p:spPr>
           <a:xfrm>
-            <a:off x="6492240" y="4846320"/>
-            <a:ext cx="2286000" cy="457200"/>
+            <a:off x="6537959" y="5029200"/>
+            <a:ext cx="2194560" cy="365760"/>
           </a:xfrm>
           <a:prstGeom prst="rect">
             <a:avLst/>
@@ -4687,20 +5110,27 @@
           <a:noFill/>
         </p:spPr>
         <p:txBody>
-          <a:bodyPr wrap="square">
-            <a:spAutoFit/>
+          <a:bodyPr wrap="square" lIns="0" rIns="0" anchor="t">
+            <a:noAutofit/>
           </a:bodyPr>
           <a:lstStyle/>
           <a:p>
             <a:pPr algn="l">
+              <a:lnSpc>
+                <a:spcPct val="115000"/>
+              </a:lnSpc>
               <a:defRPr sz="1000" b="0">
                 <a:solidFill>
                   <a:srgbClr val="6B6F6B"/>
                 </a:solidFill>
-                <a:latin typeface="Yu Gothic"/>
               </a:defRPr>
             </a:pPr>
             <a:r>
+              <a:rPr>
+                <a:latin typeface="Meiryo"/>
+                <a:ea typeface="Meiryo"/>
+                <a:cs typeface="Meiryo"/>
+              </a:rPr>
               <a:t>出典はWeb参照</a:t>
             </a:r>
           </a:p>
@@ -4714,16 +5144,18 @@
         </p:nvSpPr>
         <p:spPr>
           <a:xfrm>
-            <a:off x="9189719" y="1645920"/>
-            <a:ext cx="2651760" cy="4023360"/>
+            <a:off x="9189719" y="1600200"/>
+            <a:ext cx="2651760" cy="4114800"/>
           </a:xfrm>
           <a:prstGeom prst="roundRect">
-            <a:avLst/>
+            <a:avLst>
+              <a:gd name="adj" fmla="val 12000"/>
+            </a:avLst>
           </a:prstGeom>
           <a:solidFill>
             <a:srgbClr val="FFFFFF"/>
           </a:solidFill>
-          <a:ln w="12700">
+          <a:ln w="15875">
             <a:solidFill>
               <a:srgbClr val="E5E1D8"/>
             </a:solidFill>
@@ -4759,8 +5191,8 @@
         </p:nvSpPr>
         <p:spPr>
           <a:xfrm>
-            <a:off x="9372599" y="1828800"/>
-            <a:ext cx="2286000" cy="365760"/>
+            <a:off x="9418319" y="1828800"/>
+            <a:ext cx="2194560" cy="365760"/>
           </a:xfrm>
           <a:prstGeom prst="rect">
             <a:avLst/>
@@ -4768,20 +5200,27 @@
           <a:noFill/>
         </p:spPr>
         <p:txBody>
-          <a:bodyPr wrap="square">
-            <a:spAutoFit/>
+          <a:bodyPr wrap="square" lIns="0" rIns="0" anchor="t">
+            <a:noAutofit/>
           </a:bodyPr>
           <a:lstStyle/>
           <a:p>
             <a:pPr algn="l">
+              <a:lnSpc>
+                <a:spcPct val="115000"/>
+              </a:lnSpc>
               <a:defRPr sz="1100" b="0">
                 <a:solidFill>
                   <a:srgbClr val="6B6F6B"/>
                 </a:solidFill>
-                <a:latin typeface="Yu Gothic"/>
               </a:defRPr>
             </a:pPr>
             <a:r>
+              <a:rPr>
+                <a:latin typeface="Meiryo"/>
+                <a:ea typeface="Meiryo"/>
+                <a:cs typeface="Meiryo"/>
+              </a:rPr>
               <a:t>04 / 白書</a:t>
             </a:r>
           </a:p>
@@ -4795,8 +5234,8 @@
         </p:nvSpPr>
         <p:spPr>
           <a:xfrm>
-            <a:off x="9372599" y="2286000"/>
-            <a:ext cx="2286000" cy="822960"/>
+            <a:off x="9418319" y="2286000"/>
+            <a:ext cx="2194560" cy="731520"/>
           </a:xfrm>
           <a:prstGeom prst="rect">
             <a:avLst/>
@@ -4804,20 +5243,27 @@
           <a:noFill/>
         </p:spPr>
         <p:txBody>
-          <a:bodyPr wrap="square">
-            <a:spAutoFit/>
+          <a:bodyPr wrap="square" lIns="0" rIns="0" anchor="t">
+            <a:noAutofit/>
           </a:bodyPr>
           <a:lstStyle/>
           <a:p>
             <a:pPr algn="l">
-              <a:defRPr sz="2400" b="1">
+              <a:lnSpc>
+                <a:spcPct val="115000"/>
+              </a:lnSpc>
+              <a:defRPr sz="2100" b="1">
                 <a:solidFill>
                   <a:srgbClr val="111311"/>
                 </a:solidFill>
-                <a:latin typeface="Yu Gothic"/>
               </a:defRPr>
             </a:pPr>
             <a:r>
+              <a:rPr>
+                <a:latin typeface="Meiryo"/>
+                <a:ea typeface="Meiryo"/>
+                <a:cs typeface="Meiryo"/>
+              </a:rPr>
               <a:t>93.8% / 40%</a:t>
             </a:r>
           </a:p>
@@ -4831,8 +5277,8 @@
         </p:nvSpPr>
         <p:spPr>
           <a:xfrm>
-            <a:off x="9372599" y="3200400"/>
-            <a:ext cx="2286000" cy="914400"/>
+            <a:off x="9418319" y="3200400"/>
+            <a:ext cx="2194560" cy="1097280"/>
           </a:xfrm>
           <a:prstGeom prst="rect">
             <a:avLst/>
@@ -4840,21 +5286,37 @@
           <a:noFill/>
         </p:spPr>
         <p:txBody>
-          <a:bodyPr wrap="square">
-            <a:spAutoFit/>
+          <a:bodyPr wrap="square" lIns="0" rIns="0" anchor="t">
+            <a:noAutofit/>
           </a:bodyPr>
           <a:lstStyle/>
           <a:p>
             <a:pPr algn="l">
-              <a:defRPr sz="1300" b="0">
+              <a:lnSpc>
+                <a:spcPct val="115000"/>
+              </a:lnSpc>
+              <a:defRPr sz="1200" b="0">
                 <a:solidFill>
                   <a:srgbClr val="333333"/>
                 </a:solidFill>
-                <a:latin typeface="Yu Gothic"/>
               </a:defRPr>
             </a:pPr>
             <a:r>
+              <a:rPr>
+                <a:latin typeface="Meiryo"/>
+                <a:ea typeface="Meiryo"/>
+                <a:cs typeface="Meiryo"/>
+              </a:rPr>
               <a:t>企業は人柄を見ている</a:t>
+            </a:r>
+            <a:br/>
+            <a:r>
+              <a:rPr>
+                <a:latin typeface="Meiryo"/>
+                <a:ea typeface="Meiryo"/>
+                <a:cs typeface="Meiryo"/>
+              </a:rPr>
+              <a:t>ギャップ40%</a:t>
             </a:r>
           </a:p>
         </p:txBody>
@@ -4867,8 +5329,8 @@
         </p:nvSpPr>
         <p:spPr>
           <a:xfrm>
-            <a:off x="9372599" y="4846320"/>
-            <a:ext cx="2286000" cy="457200"/>
+            <a:off x="9418319" y="5029200"/>
+            <a:ext cx="2194560" cy="365760"/>
           </a:xfrm>
           <a:prstGeom prst="rect">
             <a:avLst/>
@@ -4876,20 +5338,27 @@
           <a:noFill/>
         </p:spPr>
         <p:txBody>
-          <a:bodyPr wrap="square">
-            <a:spAutoFit/>
+          <a:bodyPr wrap="square" lIns="0" rIns="0" anchor="t">
+            <a:noAutofit/>
           </a:bodyPr>
           <a:lstStyle/>
           <a:p>
             <a:pPr algn="l">
+              <a:lnSpc>
+                <a:spcPct val="115000"/>
+              </a:lnSpc>
               <a:defRPr sz="1000" b="0">
                 <a:solidFill>
                   <a:srgbClr val="6B6F6B"/>
                 </a:solidFill>
-                <a:latin typeface="Yu Gothic"/>
               </a:defRPr>
             </a:pPr>
             <a:r>
+              <a:rPr>
+                <a:latin typeface="Meiryo"/>
+                <a:ea typeface="Meiryo"/>
+                <a:cs typeface="Meiryo"/>
+              </a:rPr>
               <a:t>出典はWeb参照</a:t>
             </a:r>
           </a:p>
@@ -4929,8 +5398,8 @@
         </p:nvSpPr>
         <p:spPr>
           <a:xfrm>
-            <a:off x="548640" y="182880"/>
-            <a:ext cx="10972800" cy="365760"/>
+            <a:off x="548640" y="228600"/>
+            <a:ext cx="11064240" cy="365760"/>
           </a:xfrm>
           <a:prstGeom prst="rect">
             <a:avLst/>
@@ -4938,20 +5407,27 @@
           <a:noFill/>
         </p:spPr>
         <p:txBody>
-          <a:bodyPr wrap="square">
-            <a:spAutoFit/>
+          <a:bodyPr wrap="square" lIns="0" rIns="0" anchor="t">
+            <a:noAutofit/>
           </a:bodyPr>
           <a:lstStyle/>
           <a:p>
             <a:pPr algn="l">
+              <a:lnSpc>
+                <a:spcPct val="115000"/>
+              </a:lnSpc>
               <a:defRPr sz="1200" b="0">
                 <a:solidFill>
                   <a:srgbClr val="6B6F6B"/>
                 </a:solidFill>
-                <a:latin typeface="Yu Gothic"/>
               </a:defRPr>
             </a:pPr>
             <a:r>
+              <a:rPr>
+                <a:latin typeface="Meiryo"/>
+                <a:ea typeface="Meiryo"/>
+                <a:cs typeface="Meiryo"/>
+              </a:rPr>
               <a:t>(03) グラフで見る証拠 — スライド貼付用</a:t>
             </a:r>
           </a:p>
@@ -4965,8 +5441,8 @@
         </p:nvSpPr>
         <p:spPr>
           <a:xfrm>
-            <a:off x="548640" y="548640"/>
-            <a:ext cx="10972800" cy="822960"/>
+            <a:off x="548640" y="594360"/>
+            <a:ext cx="11064240" cy="822960"/>
           </a:xfrm>
           <a:prstGeom prst="rect">
             <a:avLst/>
@@ -4974,20 +5450,27 @@
           <a:noFill/>
         </p:spPr>
         <p:txBody>
-          <a:bodyPr wrap="square">
-            <a:spAutoFit/>
+          <a:bodyPr wrap="square" lIns="0" rIns="0" anchor="t">
+            <a:noAutofit/>
           </a:bodyPr>
           <a:lstStyle/>
           <a:p>
             <a:pPr algn="l">
-              <a:defRPr sz="3600" b="1">
+              <a:lnSpc>
+                <a:spcPct val="115000"/>
+              </a:lnSpc>
+              <a:defRPr sz="3200" b="1">
                 <a:solidFill>
                   <a:srgbClr val="111311"/>
                 </a:solidFill>
-                <a:latin typeface="Yu Gothic"/>
               </a:defRPr>
             </a:pPr>
             <a:r>
+              <a:rPr>
+                <a:latin typeface="Meiryo"/>
+                <a:ea typeface="Meiryo"/>
+                <a:cs typeface="Meiryo"/>
+              </a:rPr>
               <a:t>スライドそのまま、貼れる図。</a:t>
             </a:r>
           </a:p>
@@ -5002,15 +5485,17 @@
         <p:spPr>
           <a:xfrm>
             <a:off x="548640" y="1554480"/>
-            <a:ext cx="5486400" cy="4480560"/>
+            <a:ext cx="5486400" cy="4572000"/>
           </a:xfrm>
           <a:prstGeom prst="roundRect">
-            <a:avLst/>
+            <a:avLst>
+              <a:gd name="adj" fmla="val 12000"/>
+            </a:avLst>
           </a:prstGeom>
           <a:solidFill>
             <a:srgbClr val="FFFFFF"/>
           </a:solidFill>
-          <a:ln w="12700">
+          <a:ln w="15875">
             <a:solidFill>
               <a:srgbClr val="E5E1D8"/>
             </a:solidFill>
@@ -5054,8 +5539,8 @@
         </p:blipFill>
         <p:spPr>
           <a:xfrm>
-            <a:off x="731520" y="1737360"/>
-            <a:ext cx="5120640" cy="3108960"/>
+            <a:off x="822959" y="1783080"/>
+            <a:ext cx="4937760" cy="2821577"/>
           </a:xfrm>
           <a:prstGeom prst="rect">
             <a:avLst/>
@@ -5070,8 +5555,8 @@
         </p:nvSpPr>
         <p:spPr>
           <a:xfrm>
-            <a:off x="731520" y="4937760"/>
-            <a:ext cx="5120640" cy="731520"/>
+            <a:off x="822959" y="5257800"/>
+            <a:ext cx="4937760" cy="548640"/>
           </a:xfrm>
           <a:prstGeom prst="rect">
             <a:avLst/>
@@ -5079,21 +5564,28 @@
           <a:noFill/>
         </p:spPr>
         <p:txBody>
-          <a:bodyPr wrap="square">
-            <a:spAutoFit/>
+          <a:bodyPr wrap="square" lIns="0" rIns="0" anchor="t">
+            <a:noAutofit/>
           </a:bodyPr>
           <a:lstStyle/>
           <a:p>
             <a:pPr algn="ctr">
-              <a:defRPr sz="1300" b="1">
+              <a:lnSpc>
+                <a:spcPct val="115000"/>
+              </a:lnSpc>
+              <a:defRPr sz="1200" b="1">
                 <a:solidFill>
                   <a:srgbClr val="111311"/>
                 </a:solidFill>
-                <a:latin typeface="Yu Gothic"/>
               </a:defRPr>
             </a:pPr>
             <a:r>
-              <a:t>大変1位 自己分析60.7%（学情）</a:t>
+              <a:rPr>
+                <a:latin typeface="Meiryo"/>
+                <a:ea typeface="Meiryo"/>
+                <a:cs typeface="Meiryo"/>
+              </a:rPr>
+              <a:t>大変1位 自己分析60.7%（学情 n=275）</a:t>
             </a:r>
           </a:p>
         </p:txBody>
@@ -5107,15 +5599,17 @@
         <p:spPr>
           <a:xfrm>
             <a:off x="6309359" y="1554480"/>
-            <a:ext cx="5486400" cy="4480560"/>
+            <a:ext cx="5486400" cy="4572000"/>
           </a:xfrm>
           <a:prstGeom prst="roundRect">
-            <a:avLst/>
+            <a:avLst>
+              <a:gd name="adj" fmla="val 12000"/>
+            </a:avLst>
           </a:prstGeom>
           <a:solidFill>
             <a:srgbClr val="FFFFFF"/>
           </a:solidFill>
-          <a:ln w="12700">
+          <a:ln w="15875">
             <a:solidFill>
               <a:srgbClr val="E5E1D8"/>
             </a:solidFill>
@@ -5159,8 +5653,8 @@
         </p:blipFill>
         <p:spPr>
           <a:xfrm>
-            <a:off x="6492240" y="1737360"/>
-            <a:ext cx="5120640" cy="3108960"/>
+            <a:off x="6583679" y="1783080"/>
+            <a:ext cx="4937760" cy="2821577"/>
           </a:xfrm>
           <a:prstGeom prst="rect">
             <a:avLst/>
@@ -5175,8 +5669,8 @@
         </p:nvSpPr>
         <p:spPr>
           <a:xfrm>
-            <a:off x="6492240" y="4937760"/>
-            <a:ext cx="5120640" cy="731520"/>
+            <a:off x="6583679" y="5257800"/>
+            <a:ext cx="4937760" cy="548640"/>
           </a:xfrm>
           <a:prstGeom prst="rect">
             <a:avLst/>
@@ -5184,21 +5678,28 @@
           <a:noFill/>
         </p:spPr>
         <p:txBody>
-          <a:bodyPr wrap="square">
-            <a:spAutoFit/>
+          <a:bodyPr wrap="square" lIns="0" rIns="0" anchor="t">
+            <a:noAutofit/>
           </a:bodyPr>
           <a:lstStyle/>
           <a:p>
             <a:pPr algn="ctr">
-              <a:defRPr sz="1300" b="1">
+              <a:lnSpc>
+                <a:spcPct val="115000"/>
+              </a:lnSpc>
+              <a:defRPr sz="1200" b="1">
                 <a:solidFill>
                   <a:srgbClr val="111311"/>
                 </a:solidFill>
-                <a:latin typeface="Yu Gothic"/>
               </a:defRPr>
             </a:pPr>
             <a:r>
-              <a:t>9月も35.2%が逆戻り（マイナビ）</a:t>
+              <a:rPr>
+                <a:latin typeface="Meiryo"/>
+                <a:ea typeface="Meiryo"/>
+                <a:cs typeface="Meiryo"/>
+              </a:rPr>
+              <a:t>9月も35.2%が逆戻り（マイナビ n=1268）</a:t>
             </a:r>
           </a:p>
         </p:txBody>
@@ -5237,8 +5738,8 @@
         </p:nvSpPr>
         <p:spPr>
           <a:xfrm>
-            <a:off x="548640" y="182880"/>
-            <a:ext cx="10972800" cy="365760"/>
+            <a:off x="548640" y="228600"/>
+            <a:ext cx="11064240" cy="365760"/>
           </a:xfrm>
           <a:prstGeom prst="rect">
             <a:avLst/>
@@ -5246,20 +5747,27 @@
           <a:noFill/>
         </p:spPr>
         <p:txBody>
-          <a:bodyPr wrap="square">
-            <a:spAutoFit/>
+          <a:bodyPr wrap="square" lIns="0" rIns="0" anchor="t">
+            <a:noAutofit/>
           </a:bodyPr>
           <a:lstStyle/>
           <a:p>
             <a:pPr algn="l">
+              <a:lnSpc>
+                <a:spcPct val="115000"/>
+              </a:lnSpc>
               <a:defRPr sz="1200" b="0">
                 <a:solidFill>
                   <a:srgbClr val="6B6F6B"/>
                 </a:solidFill>
-                <a:latin typeface="Yu Gothic"/>
               </a:defRPr>
             </a:pPr>
             <a:r>
+              <a:rPr>
+                <a:latin typeface="Meiryo"/>
+                <a:ea typeface="Meiryo"/>
+                <a:cs typeface="Meiryo"/>
+              </a:rPr>
               <a:t>(04) 問題定義 — Process</a:t>
             </a:r>
           </a:p>
@@ -5273,8 +5781,8 @@
         </p:nvSpPr>
         <p:spPr>
           <a:xfrm>
-            <a:off x="548640" y="548640"/>
-            <a:ext cx="10972800" cy="822960"/>
+            <a:off x="548640" y="594360"/>
+            <a:ext cx="11064240" cy="822960"/>
           </a:xfrm>
           <a:prstGeom prst="rect">
             <a:avLst/>
@@ -5282,20 +5790,27 @@
           <a:noFill/>
         </p:spPr>
         <p:txBody>
-          <a:bodyPr wrap="square">
-            <a:spAutoFit/>
+          <a:bodyPr wrap="square" lIns="0" rIns="0" anchor="t">
+            <a:noAutofit/>
           </a:bodyPr>
           <a:lstStyle/>
           <a:p>
             <a:pPr algn="l">
-              <a:defRPr sz="3600" b="1">
+              <a:lnSpc>
+                <a:spcPct val="115000"/>
+              </a:lnSpc>
+              <a:defRPr sz="3200" b="1">
                 <a:solidFill>
                   <a:srgbClr val="111311"/>
                 </a:solidFill>
-                <a:latin typeface="Yu Gothic"/>
               </a:defRPr>
             </a:pPr>
             <a:r>
+              <a:rPr>
+                <a:latin typeface="Meiryo"/>
+                <a:ea typeface="Meiryo"/>
+                <a:cs typeface="Meiryo"/>
+              </a:rPr>
               <a:t>だから、問題はこれだ。</a:t>
             </a:r>
           </a:p>
@@ -5309,16 +5824,18 @@
         </p:nvSpPr>
         <p:spPr>
           <a:xfrm>
-            <a:off x="548640" y="1645920"/>
-            <a:ext cx="11064240" cy="2011680"/>
+            <a:off x="548640" y="1600200"/>
+            <a:ext cx="11064240" cy="1920240"/>
           </a:xfrm>
           <a:prstGeom prst="roundRect">
-            <a:avLst/>
+            <a:avLst>
+              <a:gd name="adj" fmla="val 12000"/>
+            </a:avLst>
           </a:prstGeom>
           <a:solidFill>
             <a:srgbClr val="FFFFFF"/>
           </a:solidFill>
-          <a:ln w="12700">
+          <a:ln w="15875">
             <a:solidFill>
               <a:srgbClr val="111311"/>
             </a:solidFill>
@@ -5354,8 +5871,8 @@
         </p:nvSpPr>
         <p:spPr>
           <a:xfrm>
-            <a:off x="914400" y="1920240"/>
-            <a:ext cx="10332720" cy="1463040"/>
+            <a:off x="1005840" y="1828800"/>
+            <a:ext cx="10149840" cy="1463040"/>
           </a:xfrm>
           <a:prstGeom prst="rect">
             <a:avLst/>
@@ -5363,20 +5880,27 @@
           <a:noFill/>
         </p:spPr>
         <p:txBody>
-          <a:bodyPr wrap="square">
-            <a:spAutoFit/>
+          <a:bodyPr wrap="square" lIns="0" rIns="0" anchor="t">
+            <a:noAutofit/>
           </a:bodyPr>
           <a:lstStyle/>
           <a:p>
             <a:pPr algn="ctr">
-              <a:defRPr sz="2000" b="1">
+              <a:lnSpc>
+                <a:spcPct val="115000"/>
+              </a:lnSpc>
+              <a:defRPr sz="1700" b="1">
                 <a:solidFill>
                   <a:srgbClr val="B91C1C"/>
                 </a:solidFill>
-                <a:latin typeface="Yu Gothic"/>
               </a:defRPr>
             </a:pPr>
             <a:r>
+              <a:rPr>
+                <a:latin typeface="Meiryo"/>
+                <a:ea typeface="Meiryo"/>
+                <a:cs typeface="Meiryo"/>
+              </a:rPr>
               <a:t>本来は全員が十分な自己理解で挑むべきにもかかわらず、やり方とゴールが分からないために、6割が苦戦したまま選考に進んでしまうことが問題である。</a:t>
             </a:r>
           </a:p>
@@ -5390,16 +5914,18 @@
         </p:nvSpPr>
         <p:spPr>
           <a:xfrm>
-            <a:off x="548640" y="4023360"/>
-            <a:ext cx="2651760" cy="1737360"/>
+            <a:off x="548640" y="3794760"/>
+            <a:ext cx="2651760" cy="1920240"/>
           </a:xfrm>
           <a:prstGeom prst="roundRect">
-            <a:avLst/>
+            <a:avLst>
+              <a:gd name="adj" fmla="val 12000"/>
+            </a:avLst>
           </a:prstGeom>
           <a:solidFill>
             <a:srgbClr val="FFFFFF"/>
           </a:solidFill>
-          <a:ln w="12700">
+          <a:ln w="15875">
             <a:solidFill>
               <a:srgbClr val="E5E1D8"/>
             </a:solidFill>
@@ -5435,8 +5961,8 @@
         </p:nvSpPr>
         <p:spPr>
           <a:xfrm>
-            <a:off x="731520" y="4206240"/>
-            <a:ext cx="2286000" cy="365760"/>
+            <a:off x="777240" y="4023360"/>
+            <a:ext cx="2194560" cy="365760"/>
           </a:xfrm>
           <a:prstGeom prst="rect">
             <a:avLst/>
@@ -5444,20 +5970,27 @@
           <a:noFill/>
         </p:spPr>
         <p:txBody>
-          <a:bodyPr wrap="square">
-            <a:spAutoFit/>
+          <a:bodyPr wrap="square" lIns="0" rIns="0" anchor="t">
+            <a:noAutofit/>
           </a:bodyPr>
           <a:lstStyle/>
           <a:p>
             <a:pPr algn="l">
+              <a:lnSpc>
+                <a:spcPct val="115000"/>
+              </a:lnSpc>
               <a:defRPr sz="1100" b="0">
                 <a:solidFill>
                   <a:srgbClr val="6B6F6B"/>
                 </a:solidFill>
-                <a:latin typeface="Yu Gothic"/>
               </a:defRPr>
             </a:pPr>
             <a:r>
+              <a:rPr>
+                <a:latin typeface="Meiryo"/>
+                <a:ea typeface="Meiryo"/>
+                <a:cs typeface="Meiryo"/>
+              </a:rPr>
               <a:t>01 理想</a:t>
             </a:r>
           </a:p>
@@ -5471,8 +6004,8 @@
         </p:nvSpPr>
         <p:spPr>
           <a:xfrm>
-            <a:off x="731520" y="4663440"/>
-            <a:ext cx="2286000" cy="640080"/>
+            <a:off x="777240" y="4480560"/>
+            <a:ext cx="2194560" cy="640080"/>
           </a:xfrm>
           <a:prstGeom prst="rect">
             <a:avLst/>
@@ -5480,20 +6013,27 @@
           <a:noFill/>
         </p:spPr>
         <p:txBody>
-          <a:bodyPr wrap="square">
-            <a:spAutoFit/>
+          <a:bodyPr wrap="square" lIns="0" rIns="0" anchor="t">
+            <a:noAutofit/>
           </a:bodyPr>
           <a:lstStyle/>
           <a:p>
             <a:pPr algn="l">
-              <a:defRPr sz="1800" b="1">
+              <a:lnSpc>
+                <a:spcPct val="115000"/>
+              </a:lnSpc>
+              <a:defRPr sz="1700" b="1">
                 <a:solidFill>
                   <a:srgbClr val="111311"/>
                 </a:solidFill>
-                <a:latin typeface="Yu Gothic"/>
               </a:defRPr>
             </a:pPr>
             <a:r>
+              <a:rPr>
+                <a:latin typeface="Meiryo"/>
+                <a:ea typeface="Meiryo"/>
+                <a:cs typeface="Meiryo"/>
+              </a:rPr>
               <a:t>強みを語れる</a:t>
             </a:r>
           </a:p>
@@ -5507,16 +6047,18 @@
         </p:nvSpPr>
         <p:spPr>
           <a:xfrm>
-            <a:off x="3429000" y="4023360"/>
-            <a:ext cx="2651760" cy="1737360"/>
+            <a:off x="3429000" y="3794760"/>
+            <a:ext cx="2651760" cy="1920240"/>
           </a:xfrm>
           <a:prstGeom prst="roundRect">
-            <a:avLst/>
+            <a:avLst>
+              <a:gd name="adj" fmla="val 12000"/>
+            </a:avLst>
           </a:prstGeom>
           <a:solidFill>
             <a:srgbClr val="FFFFFF"/>
           </a:solidFill>
-          <a:ln w="12700">
+          <a:ln w="15875">
             <a:solidFill>
               <a:srgbClr val="E5E1D8"/>
             </a:solidFill>
@@ -5552,8 +6094,8 @@
         </p:nvSpPr>
         <p:spPr>
           <a:xfrm>
-            <a:off x="3611880" y="4206240"/>
-            <a:ext cx="2286000" cy="365760"/>
+            <a:off x="3657600" y="4023360"/>
+            <a:ext cx="2194560" cy="365760"/>
           </a:xfrm>
           <a:prstGeom prst="rect">
             <a:avLst/>
@@ -5561,20 +6103,27 @@
           <a:noFill/>
         </p:spPr>
         <p:txBody>
-          <a:bodyPr wrap="square">
-            <a:spAutoFit/>
+          <a:bodyPr wrap="square" lIns="0" rIns="0" anchor="t">
+            <a:noAutofit/>
           </a:bodyPr>
           <a:lstStyle/>
           <a:p>
             <a:pPr algn="l">
+              <a:lnSpc>
+                <a:spcPct val="115000"/>
+              </a:lnSpc>
               <a:defRPr sz="1100" b="0">
                 <a:solidFill>
                   <a:srgbClr val="6B6F6B"/>
                 </a:solidFill>
-                <a:latin typeface="Yu Gothic"/>
               </a:defRPr>
             </a:pPr>
             <a:r>
+              <a:rPr>
+                <a:latin typeface="Meiryo"/>
+                <a:ea typeface="Meiryo"/>
+                <a:cs typeface="Meiryo"/>
+              </a:rPr>
               <a:t>02 現状</a:t>
             </a:r>
           </a:p>
@@ -5588,8 +6137,8 @@
         </p:nvSpPr>
         <p:spPr>
           <a:xfrm>
-            <a:off x="3611880" y="4663440"/>
-            <a:ext cx="2286000" cy="640080"/>
+            <a:off x="3657600" y="4480560"/>
+            <a:ext cx="2194560" cy="640080"/>
           </a:xfrm>
           <a:prstGeom prst="rect">
             <a:avLst/>
@@ -5597,20 +6146,27 @@
           <a:noFill/>
         </p:spPr>
         <p:txBody>
-          <a:bodyPr wrap="square">
-            <a:spAutoFit/>
+          <a:bodyPr wrap="square" lIns="0" rIns="0" anchor="t">
+            <a:noAutofit/>
           </a:bodyPr>
           <a:lstStyle/>
           <a:p>
             <a:pPr algn="l">
-              <a:defRPr sz="1800" b="1">
+              <a:lnSpc>
+                <a:spcPct val="115000"/>
+              </a:lnSpc>
+              <a:defRPr sz="1700" b="1">
                 <a:solidFill>
                   <a:srgbClr val="111311"/>
                 </a:solidFill>
-                <a:latin typeface="Yu Gothic"/>
               </a:defRPr>
             </a:pPr>
             <a:r>
+              <a:rPr>
+                <a:latin typeface="Meiryo"/>
+                <a:ea typeface="Meiryo"/>
+                <a:cs typeface="Meiryo"/>
+              </a:rPr>
               <a:t>手順不明</a:t>
             </a:r>
           </a:p>
@@ -5624,16 +6180,18 @@
         </p:nvSpPr>
         <p:spPr>
           <a:xfrm>
-            <a:off x="6309359" y="4023360"/>
-            <a:ext cx="2651760" cy="1737360"/>
+            <a:off x="6309359" y="3794760"/>
+            <a:ext cx="2651760" cy="1920240"/>
           </a:xfrm>
           <a:prstGeom prst="roundRect">
-            <a:avLst/>
+            <a:avLst>
+              <a:gd name="adj" fmla="val 12000"/>
+            </a:avLst>
           </a:prstGeom>
           <a:solidFill>
             <a:srgbClr val="FFFFFF"/>
           </a:solidFill>
-          <a:ln w="12700">
+          <a:ln w="15875">
             <a:solidFill>
               <a:srgbClr val="E5E1D8"/>
             </a:solidFill>
@@ -5669,8 +6227,8 @@
         </p:nvSpPr>
         <p:spPr>
           <a:xfrm>
-            <a:off x="6492240" y="4206240"/>
-            <a:ext cx="2286000" cy="365760"/>
+            <a:off x="6537959" y="4023360"/>
+            <a:ext cx="2194560" cy="365760"/>
           </a:xfrm>
           <a:prstGeom prst="rect">
             <a:avLst/>
@@ -5678,20 +6236,27 @@
           <a:noFill/>
         </p:spPr>
         <p:txBody>
-          <a:bodyPr wrap="square">
-            <a:spAutoFit/>
+          <a:bodyPr wrap="square" lIns="0" rIns="0" anchor="t">
+            <a:noAutofit/>
           </a:bodyPr>
           <a:lstStyle/>
           <a:p>
             <a:pPr algn="l">
+              <a:lnSpc>
+                <a:spcPct val="115000"/>
+              </a:lnSpc>
               <a:defRPr sz="1100" b="0">
                 <a:solidFill>
                   <a:srgbClr val="6B6F6B"/>
                 </a:solidFill>
-                <a:latin typeface="Yu Gothic"/>
               </a:defRPr>
             </a:pPr>
             <a:r>
+              <a:rPr>
+                <a:latin typeface="Meiryo"/>
+                <a:ea typeface="Meiryo"/>
+                <a:cs typeface="Meiryo"/>
+              </a:rPr>
               <a:t>03 ギャップ</a:t>
             </a:r>
           </a:p>
@@ -5705,8 +6270,8 @@
         </p:nvSpPr>
         <p:spPr>
           <a:xfrm>
-            <a:off x="6492240" y="4663440"/>
-            <a:ext cx="2286000" cy="640080"/>
+            <a:off x="6537959" y="4480560"/>
+            <a:ext cx="2194560" cy="640080"/>
           </a:xfrm>
           <a:prstGeom prst="rect">
             <a:avLst/>
@@ -5714,20 +6279,27 @@
           <a:noFill/>
         </p:spPr>
         <p:txBody>
-          <a:bodyPr wrap="square">
-            <a:spAutoFit/>
+          <a:bodyPr wrap="square" lIns="0" rIns="0" anchor="t">
+            <a:noAutofit/>
           </a:bodyPr>
           <a:lstStyle/>
           <a:p>
             <a:pPr algn="l">
-              <a:defRPr sz="1800" b="1">
+              <a:lnSpc>
+                <a:spcPct val="115000"/>
+              </a:lnSpc>
+              <a:defRPr sz="1700" b="1">
                 <a:solidFill>
                   <a:srgbClr val="111311"/>
                 </a:solidFill>
-                <a:latin typeface="Yu Gothic"/>
               </a:defRPr>
             </a:pPr>
             <a:r>
+              <a:rPr>
+                <a:latin typeface="Meiryo"/>
+                <a:ea typeface="Meiryo"/>
+                <a:cs typeface="Meiryo"/>
+              </a:rPr>
               <a:t>自信なき選考</a:t>
             </a:r>
           </a:p>
@@ -5741,16 +6313,18 @@
         </p:nvSpPr>
         <p:spPr>
           <a:xfrm>
-            <a:off x="9189719" y="4023360"/>
-            <a:ext cx="2651760" cy="1737360"/>
+            <a:off x="9189719" y="3794760"/>
+            <a:ext cx="2651760" cy="1920240"/>
           </a:xfrm>
           <a:prstGeom prst="roundRect">
-            <a:avLst/>
+            <a:avLst>
+              <a:gd name="adj" fmla="val 12000"/>
+            </a:avLst>
           </a:prstGeom>
           <a:solidFill>
             <a:srgbClr val="FFFFFF"/>
           </a:solidFill>
-          <a:ln w="12700">
+          <a:ln w="15875">
             <a:solidFill>
               <a:srgbClr val="E5E1D8"/>
             </a:solidFill>
@@ -5786,8 +6360,8 @@
         </p:nvSpPr>
         <p:spPr>
           <a:xfrm>
-            <a:off x="9372599" y="4206240"/>
-            <a:ext cx="2286000" cy="365760"/>
+            <a:off x="9418319" y="4023360"/>
+            <a:ext cx="2194560" cy="365760"/>
           </a:xfrm>
           <a:prstGeom prst="rect">
             <a:avLst/>
@@ -5795,20 +6369,27 @@
           <a:noFill/>
         </p:spPr>
         <p:txBody>
-          <a:bodyPr wrap="square">
-            <a:spAutoFit/>
+          <a:bodyPr wrap="square" lIns="0" rIns="0" anchor="t">
+            <a:noAutofit/>
           </a:bodyPr>
           <a:lstStyle/>
           <a:p>
             <a:pPr algn="l">
+              <a:lnSpc>
+                <a:spcPct val="115000"/>
+              </a:lnSpc>
               <a:defRPr sz="1100" b="0">
                 <a:solidFill>
                   <a:srgbClr val="6B6F6B"/>
                 </a:solidFill>
-                <a:latin typeface="Yu Gothic"/>
               </a:defRPr>
             </a:pPr>
             <a:r>
+              <a:rPr>
+                <a:latin typeface="Meiryo"/>
+                <a:ea typeface="Meiryo"/>
+                <a:cs typeface="Meiryo"/>
+              </a:rPr>
               <a:t>04 意義</a:t>
             </a:r>
           </a:p>
@@ -5822,8 +6403,8 @@
         </p:nvSpPr>
         <p:spPr>
           <a:xfrm>
-            <a:off x="9372599" y="4663440"/>
-            <a:ext cx="2286000" cy="640080"/>
+            <a:off x="9418319" y="4480560"/>
+            <a:ext cx="2194560" cy="640080"/>
           </a:xfrm>
           <a:prstGeom prst="rect">
             <a:avLst/>
@@ -5831,20 +6412,27 @@
           <a:noFill/>
         </p:spPr>
         <p:txBody>
-          <a:bodyPr wrap="square">
-            <a:spAutoFit/>
+          <a:bodyPr wrap="square" lIns="0" rIns="0" anchor="t">
+            <a:noAutofit/>
           </a:bodyPr>
           <a:lstStyle/>
           <a:p>
             <a:pPr algn="l">
-              <a:defRPr sz="1800" b="1">
+              <a:lnSpc>
+                <a:spcPct val="115000"/>
+              </a:lnSpc>
+              <a:defRPr sz="1700" b="1">
                 <a:solidFill>
                   <a:srgbClr val="111311"/>
                 </a:solidFill>
-                <a:latin typeface="Yu Gothic"/>
               </a:defRPr>
             </a:pPr>
             <a:r>
+              <a:rPr>
+                <a:latin typeface="Meiryo"/>
+                <a:ea typeface="Meiryo"/>
+                <a:cs typeface="Meiryo"/>
+              </a:rPr>
               <a:t>三者損失</a:t>
             </a:r>
           </a:p>
@@ -5884,8 +6472,8 @@
         </p:nvSpPr>
         <p:spPr>
           <a:xfrm>
-            <a:off x="548640" y="182880"/>
-            <a:ext cx="10972800" cy="365760"/>
+            <a:off x="548640" y="228600"/>
+            <a:ext cx="11064240" cy="365760"/>
           </a:xfrm>
           <a:prstGeom prst="rect">
             <a:avLst/>
@@ -5893,20 +6481,27 @@
           <a:noFill/>
         </p:spPr>
         <p:txBody>
-          <a:bodyPr wrap="square">
-            <a:spAutoFit/>
+          <a:bodyPr wrap="square" lIns="0" rIns="0" anchor="t">
+            <a:noAutofit/>
           </a:bodyPr>
           <a:lstStyle/>
           <a:p>
             <a:pPr algn="l">
+              <a:lnSpc>
+                <a:spcPct val="115000"/>
+              </a:lnSpc>
               <a:defRPr sz="1200" b="0">
                 <a:solidFill>
                   <a:srgbClr val="6B6F6B"/>
                 </a:solidFill>
-                <a:latin typeface="Yu Gothic"/>
               </a:defRPr>
             </a:pPr>
             <a:r>
+              <a:rPr>
+                <a:latin typeface="Meiryo"/>
+                <a:ea typeface="Meiryo"/>
+                <a:cs typeface="Meiryo"/>
+              </a:rPr>
               <a:t>(05) なぜ解決すべきか &amp; 次回</a:t>
             </a:r>
           </a:p>
@@ -5920,8 +6515,8 @@
         </p:nvSpPr>
         <p:spPr>
           <a:xfrm>
-            <a:off x="548640" y="548640"/>
-            <a:ext cx="10972800" cy="822960"/>
+            <a:off x="548640" y="594360"/>
+            <a:ext cx="11064240" cy="822960"/>
           </a:xfrm>
           <a:prstGeom prst="rect">
             <a:avLst/>
@@ -5929,20 +6524,27 @@
           <a:noFill/>
         </p:spPr>
         <p:txBody>
-          <a:bodyPr wrap="square">
-            <a:spAutoFit/>
+          <a:bodyPr wrap="square" lIns="0" rIns="0" anchor="t">
+            <a:noAutofit/>
           </a:bodyPr>
           <a:lstStyle/>
           <a:p>
             <a:pPr algn="l">
-              <a:defRPr sz="3600" b="1">
+              <a:lnSpc>
+                <a:spcPct val="115000"/>
+              </a:lnSpc>
+              <a:defRPr sz="3200" b="1">
                 <a:solidFill>
                   <a:srgbClr val="111311"/>
                 </a:solidFill>
-                <a:latin typeface="Yu Gothic"/>
               </a:defRPr>
             </a:pPr>
             <a:r>
+              <a:rPr>
+                <a:latin typeface="Meiryo"/>
+                <a:ea typeface="Meiryo"/>
+                <a:cs typeface="Meiryo"/>
+              </a:rPr>
               <a:t>放置は三者損失。次へ。</a:t>
             </a:r>
           </a:p>
@@ -5956,16 +6558,18 @@
         </p:nvSpPr>
         <p:spPr>
           <a:xfrm>
-            <a:off x="548640" y="1645920"/>
-            <a:ext cx="5486400" cy="4206240"/>
+            <a:off x="548640" y="1600200"/>
+            <a:ext cx="5486400" cy="4297680"/>
           </a:xfrm>
           <a:prstGeom prst="roundRect">
-            <a:avLst/>
+            <a:avLst>
+              <a:gd name="adj" fmla="val 12000"/>
+            </a:avLst>
           </a:prstGeom>
           <a:solidFill>
             <a:srgbClr val="FFFFFF"/>
           </a:solidFill>
-          <a:ln w="12700">
+          <a:ln w="15875">
             <a:solidFill>
               <a:srgbClr val="E5E1D8"/>
             </a:solidFill>
@@ -6001,8 +6605,8 @@
         </p:nvSpPr>
         <p:spPr>
           <a:xfrm>
-            <a:off x="822960" y="1828800"/>
-            <a:ext cx="4937760" cy="3657600"/>
+            <a:off x="868680" y="1874519"/>
+            <a:ext cx="4846320" cy="3657600"/>
           </a:xfrm>
           <a:prstGeom prst="rect">
             <a:avLst/>
@@ -6010,32 +6614,122 @@
           <a:noFill/>
         </p:spPr>
         <p:txBody>
-          <a:bodyPr wrap="square">
-            <a:spAutoFit/>
+          <a:bodyPr wrap="square" anchor="t">
+            <a:noAutofit/>
           </a:bodyPr>
           <a:lstStyle/>
           <a:p>
-            <a:pPr algn="l">
-              <a:defRPr sz="1400" b="0">
+            <a:pPr>
+              <a:lnSpc>
+                <a:spcPct val="120000"/>
+              </a:lnSpc>
+              <a:spcAft>
+                <a:spcPts val="400"/>
+              </a:spcAft>
+              <a:defRPr sz="1300">
                 <a:solidFill>
                   <a:srgbClr val="333333"/>
                 </a:solidFill>
-                <a:latin typeface="Yu Gothic"/>
               </a:defRPr>
             </a:pPr>
             <a:r>
-              <a:t>● 企業93.8%が人柄重視＝言語化が評価に直結</a:t>
-            </a:r>
-            <a:br/>
-            <a:r>
-              <a:t>● 学生の成果実感1位も自己分析46.5%</a:t>
-            </a:r>
-            <a:br/>
-            <a:r>
+              <a:rPr>
+                <a:latin typeface="Meiryo"/>
+                <a:ea typeface="Meiryo"/>
+                <a:cs typeface="Meiryo"/>
+              </a:rPr>
+              <a:t>● 企業93.8%が人柄重視</a:t>
+            </a:r>
+          </a:p>
+          <a:p>
+            <a:pPr>
+              <a:lnSpc>
+                <a:spcPct val="120000"/>
+              </a:lnSpc>
+              <a:spcAft>
+                <a:spcPts val="400"/>
+              </a:spcAft>
+              <a:defRPr sz="1300">
+                <a:solidFill>
+                  <a:srgbClr val="333333"/>
+                </a:solidFill>
+              </a:defRPr>
+            </a:pPr>
+            <a:r>
+              <a:rPr>
+                <a:latin typeface="Meiryo"/>
+                <a:ea typeface="Meiryo"/>
+                <a:cs typeface="Meiryo"/>
+              </a:rPr>
+              <a:t>　言語化が評価に直結</a:t>
+            </a:r>
+          </a:p>
+          <a:p>
+            <a:pPr>
+              <a:lnSpc>
+                <a:spcPct val="120000"/>
+              </a:lnSpc>
+              <a:spcAft>
+                <a:spcPts val="400"/>
+              </a:spcAft>
+              <a:defRPr sz="1300">
+                <a:solidFill>
+                  <a:srgbClr val="333333"/>
+                </a:solidFill>
+              </a:defRPr>
+            </a:pPr>
+            <a:r>
+              <a:rPr>
+                <a:latin typeface="Meiryo"/>
+                <a:ea typeface="Meiryo"/>
+                <a:cs typeface="Meiryo"/>
+              </a:rPr>
+              <a:t>● 成果実感1位も自己分析46.5%</a:t>
+            </a:r>
+          </a:p>
+          <a:p>
+            <a:pPr>
+              <a:lnSpc>
+                <a:spcPct val="120000"/>
+              </a:lnSpc>
+              <a:spcAft>
+                <a:spcPts val="400"/>
+              </a:spcAft>
+              <a:defRPr sz="1300">
+                <a:solidFill>
+                  <a:srgbClr val="333333"/>
+                </a:solidFill>
+              </a:defRPr>
+            </a:pPr>
+            <a:r>
+              <a:rPr>
+                <a:latin typeface="Meiryo"/>
+                <a:ea typeface="Meiryo"/>
+                <a:cs typeface="Meiryo"/>
+              </a:rPr>
               <a:t>● 社会人40%が入社後ギャップ</a:t>
             </a:r>
-            <a:br/>
-            <a:r>
+          </a:p>
+          <a:p>
+            <a:pPr>
+              <a:lnSpc>
+                <a:spcPct val="120000"/>
+              </a:lnSpc>
+              <a:spcAft>
+                <a:spcPts val="400"/>
+              </a:spcAft>
+              <a:defRPr sz="1300">
+                <a:solidFill>
+                  <a:srgbClr val="333333"/>
+                </a:solidFill>
+              </a:defRPr>
+            </a:pPr>
+            <a:r>
+              <a:rPr>
+                <a:latin typeface="Meiryo"/>
+                <a:ea typeface="Meiryo"/>
+                <a:cs typeface="Meiryo"/>
+              </a:rPr>
               <a:t>→ 学生・企業・社会の三者損失</a:t>
             </a:r>
           </a:p>
@@ -6049,16 +6743,18 @@
         </p:nvSpPr>
         <p:spPr>
           <a:xfrm>
-            <a:off x="6126480" y="1645920"/>
-            <a:ext cx="5486400" cy="4206240"/>
+            <a:off x="6126480" y="1600200"/>
+            <a:ext cx="5486400" cy="4297680"/>
           </a:xfrm>
           <a:prstGeom prst="roundRect">
-            <a:avLst/>
+            <a:avLst>
+              <a:gd name="adj" fmla="val 12000"/>
+            </a:avLst>
           </a:prstGeom>
           <a:solidFill>
             <a:srgbClr val="FFFFFF"/>
           </a:solidFill>
-          <a:ln w="12700">
+          <a:ln w="15875">
             <a:solidFill>
               <a:srgbClr val="E5E1D8"/>
             </a:solidFill>
@@ -6094,8 +6790,8 @@
         </p:nvSpPr>
         <p:spPr>
           <a:xfrm>
-            <a:off x="6400800" y="1828800"/>
-            <a:ext cx="4937760" cy="3657600"/>
+            <a:off x="6446520" y="1874519"/>
+            <a:ext cx="4846320" cy="3657600"/>
           </a:xfrm>
           <a:prstGeom prst="rect">
             <a:avLst/>
@@ -6103,33 +6799,100 @@
           <a:noFill/>
         </p:spPr>
         <p:txBody>
-          <a:bodyPr wrap="square">
-            <a:spAutoFit/>
+          <a:bodyPr wrap="square" anchor="t">
+            <a:noAutofit/>
           </a:bodyPr>
           <a:lstStyle/>
           <a:p>
-            <a:pPr algn="l">
-              <a:defRPr sz="1400" b="0">
+            <a:pPr>
+              <a:lnSpc>
+                <a:spcPct val="120000"/>
+              </a:lnSpc>
+              <a:spcAft>
+                <a:spcPts val="400"/>
+              </a:spcAft>
+              <a:defRPr sz="1300">
                 <a:solidFill>
                   <a:srgbClr val="333333"/>
                 </a:solidFill>
-                <a:latin typeface="Yu Gothic"/>
               </a:defRPr>
             </a:pPr>
             <a:r>
+              <a:rPr>
+                <a:latin typeface="Meiryo"/>
+                <a:ea typeface="Meiryo"/>
+                <a:cs typeface="Meiryo"/>
+              </a:rPr>
               <a:t>まとめ：質とタイミングのギャップ</a:t>
             </a:r>
-            <a:br/>
-            <a:r>
-              <a:t>次回1：原因分析（なぜ伝わらないか）</a:t>
-            </a:r>
-            <a:br/>
-            <a:r>
+          </a:p>
+          <a:p>
+            <a:pPr>
+              <a:lnSpc>
+                <a:spcPct val="120000"/>
+              </a:lnSpc>
+              <a:spcAft>
+                <a:spcPts val="400"/>
+              </a:spcAft>
+              <a:defRPr sz="1300">
+                <a:solidFill>
+                  <a:srgbClr val="333333"/>
+                </a:solidFill>
+              </a:defRPr>
+            </a:pPr>
+            <a:r>
+              <a:rPr>
+                <a:latin typeface="Meiryo"/>
+                <a:ea typeface="Meiryo"/>
+                <a:cs typeface="Meiryo"/>
+              </a:rPr>
+              <a:t>次回1：原因分析</a:t>
+            </a:r>
+          </a:p>
+          <a:p>
+            <a:pPr>
+              <a:lnSpc>
+                <a:spcPct val="120000"/>
+              </a:lnSpc>
+              <a:spcAft>
+                <a:spcPts val="400"/>
+              </a:spcAft>
+              <a:defRPr sz="1300">
+                <a:solidFill>
+                  <a:srgbClr val="333333"/>
+                </a:solidFill>
+              </a:defRPr>
+            </a:pPr>
+            <a:r>
+              <a:rPr>
+                <a:latin typeface="Meiryo"/>
+                <a:ea typeface="Meiryo"/>
+                <a:cs typeface="Meiryo"/>
+              </a:rPr>
               <a:t>次回2：既存支援の調査</a:t>
             </a:r>
-            <a:br/>
-            <a:r>
-              <a:t>締め：なんとなく就活をなくすために</a:t>
+          </a:p>
+          <a:p>
+            <a:pPr>
+              <a:lnSpc>
+                <a:spcPct val="120000"/>
+              </a:lnSpc>
+              <a:spcAft>
+                <a:spcPts val="400"/>
+              </a:spcAft>
+              <a:defRPr sz="1300">
+                <a:solidFill>
+                  <a:srgbClr val="333333"/>
+                </a:solidFill>
+              </a:defRPr>
+            </a:pPr>
+            <a:r>
+              <a:rPr>
+                <a:latin typeface="Meiryo"/>
+                <a:ea typeface="Meiryo"/>
+                <a:cs typeface="Meiryo"/>
+              </a:rPr>
+              <a:t>締め：なんとなく就活をなくす</a:t>
             </a:r>
           </a:p>
         </p:txBody>
@@ -6142,8 +6905,8 @@
         </p:nvSpPr>
         <p:spPr>
           <a:xfrm>
-            <a:off x="548640" y="6035040"/>
-            <a:ext cx="10972800" cy="365760"/>
+            <a:off x="548640" y="6080760"/>
+            <a:ext cx="11064240" cy="365760"/>
           </a:xfrm>
           <a:prstGeom prst="rect">
             <a:avLst/>
@@ -6151,20 +6914,27 @@
           <a:noFill/>
         </p:spPr>
         <p:txBody>
-          <a:bodyPr wrap="square">
-            <a:spAutoFit/>
+          <a:bodyPr wrap="square" lIns="0" rIns="0" anchor="t">
+            <a:noAutofit/>
           </a:bodyPr>
           <a:lstStyle/>
           <a:p>
             <a:pPr algn="ctr">
+              <a:lnSpc>
+                <a:spcPct val="115000"/>
+              </a:lnSpc>
               <a:defRPr sz="1000" b="0">
                 <a:solidFill>
                   <a:srgbClr val="6B6F6B"/>
                 </a:solidFill>
-                <a:latin typeface="Yu Gothic"/>
               </a:defRPr>
             </a:pPr>
             <a:r>
+              <a:rPr>
+                <a:latin typeface="Meiryo"/>
+                <a:ea typeface="Meiryo"/>
+                <a:cs typeface="Meiryo"/>
+              </a:rPr>
               <a:t>全数値・出典： https://taku010201040.github.io/jibun-mayogo-2026/</a:t>
             </a:r>
           </a:p>
